--- a/ゲーム科1年/00_前期/ゲームプログラミングⅢ/ゲーム数学/実習/04_円移動.pptx
+++ b/ゲーム科1年/00_前期/ゲームプログラミングⅢ/ゲーム数学/実習/04_円移動.pptx
@@ -7,10 +7,11 @@
   <p:sldIdLst>
     <p:sldId id="256" r:id="rId2"/>
     <p:sldId id="258" r:id="rId3"/>
-    <p:sldId id="259" r:id="rId4"/>
-    <p:sldId id="257" r:id="rId5"/>
-    <p:sldId id="260" r:id="rId6"/>
-    <p:sldId id="261" r:id="rId7"/>
+    <p:sldId id="257" r:id="rId4"/>
+    <p:sldId id="262" r:id="rId5"/>
+    <p:sldId id="263" r:id="rId6"/>
+    <p:sldId id="264" r:id="rId7"/>
+    <p:sldId id="265" r:id="rId8"/>
   </p:sldIdLst>
   <p:sldSz cx="12192000" cy="6858000"/>
   <p:notesSz cx="6858000" cy="9144000"/>
@@ -774,7 +775,7 @@
           <a:p>
             <a:fld id="{E9CC885B-4903-4D54-9A93-00025F12DED9}" type="datetimeFigureOut">
               <a:rPr kumimoji="1" lang="ja-JP" altLang="en-US" smtClean="0"/>
-              <a:t>2024/11/5</a:t>
+              <a:t>2026/2/19</a:t>
             </a:fld>
             <a:endParaRPr kumimoji="1" lang="ja-JP" altLang="en-US"/>
           </a:p>
@@ -1004,7 +1005,7 @@
           <a:p>
             <a:fld id="{E9CC885B-4903-4D54-9A93-00025F12DED9}" type="datetimeFigureOut">
               <a:rPr kumimoji="1" lang="ja-JP" altLang="en-US" smtClean="0"/>
-              <a:t>2024/11/5</a:t>
+              <a:t>2026/2/19</a:t>
             </a:fld>
             <a:endParaRPr kumimoji="1" lang="ja-JP" altLang="en-US"/>
           </a:p>
@@ -1244,7 +1245,7 @@
           <a:p>
             <a:fld id="{E9CC885B-4903-4D54-9A93-00025F12DED9}" type="datetimeFigureOut">
               <a:rPr kumimoji="1" lang="ja-JP" altLang="en-US" smtClean="0"/>
-              <a:t>2024/11/5</a:t>
+              <a:t>2026/2/19</a:t>
             </a:fld>
             <a:endParaRPr kumimoji="1" lang="ja-JP" altLang="en-US"/>
           </a:p>
@@ -1474,7 +1475,7 @@
           <a:p>
             <a:fld id="{E9CC885B-4903-4D54-9A93-00025F12DED9}" type="datetimeFigureOut">
               <a:rPr kumimoji="1" lang="ja-JP" altLang="en-US" smtClean="0"/>
-              <a:t>2024/11/5</a:t>
+              <a:t>2026/2/19</a:t>
             </a:fld>
             <a:endParaRPr kumimoji="1" lang="ja-JP" altLang="en-US"/>
           </a:p>
@@ -1749,7 +1750,7 @@
           <a:p>
             <a:fld id="{E9CC885B-4903-4D54-9A93-00025F12DED9}" type="datetimeFigureOut">
               <a:rPr kumimoji="1" lang="ja-JP" altLang="en-US" smtClean="0"/>
-              <a:t>2024/11/5</a:t>
+              <a:t>2026/2/19</a:t>
             </a:fld>
             <a:endParaRPr kumimoji="1" lang="ja-JP" altLang="en-US"/>
           </a:p>
@@ -2078,7 +2079,7 @@
           <a:p>
             <a:fld id="{E9CC885B-4903-4D54-9A93-00025F12DED9}" type="datetimeFigureOut">
               <a:rPr kumimoji="1" lang="ja-JP" altLang="en-US" smtClean="0"/>
-              <a:t>2024/11/5</a:t>
+              <a:t>2026/2/19</a:t>
             </a:fld>
             <a:endParaRPr kumimoji="1" lang="ja-JP" altLang="en-US"/>
           </a:p>
@@ -2554,7 +2555,7 @@
           <a:p>
             <a:fld id="{E9CC885B-4903-4D54-9A93-00025F12DED9}" type="datetimeFigureOut">
               <a:rPr kumimoji="1" lang="ja-JP" altLang="en-US" smtClean="0"/>
-              <a:t>2024/11/5</a:t>
+              <a:t>2026/2/19</a:t>
             </a:fld>
             <a:endParaRPr kumimoji="1" lang="ja-JP" altLang="en-US"/>
           </a:p>
@@ -2695,7 +2696,7 @@
           <a:p>
             <a:fld id="{E9CC885B-4903-4D54-9A93-00025F12DED9}" type="datetimeFigureOut">
               <a:rPr kumimoji="1" lang="ja-JP" altLang="en-US" smtClean="0"/>
-              <a:t>2024/11/5</a:t>
+              <a:t>2026/2/19</a:t>
             </a:fld>
             <a:endParaRPr kumimoji="1" lang="ja-JP" altLang="en-US"/>
           </a:p>
@@ -2808,7 +2809,7 @@
           <a:p>
             <a:fld id="{E9CC885B-4903-4D54-9A93-00025F12DED9}" type="datetimeFigureOut">
               <a:rPr kumimoji="1" lang="ja-JP" altLang="en-US" smtClean="0"/>
-              <a:t>2024/11/5</a:t>
+              <a:t>2026/2/19</a:t>
             </a:fld>
             <a:endParaRPr kumimoji="1" lang="ja-JP" altLang="en-US"/>
           </a:p>
@@ -3151,7 +3152,7 @@
           <a:p>
             <a:fld id="{E9CC885B-4903-4D54-9A93-00025F12DED9}" type="datetimeFigureOut">
               <a:rPr kumimoji="1" lang="ja-JP" altLang="en-US" smtClean="0"/>
-              <a:t>2024/11/5</a:t>
+              <a:t>2026/2/19</a:t>
             </a:fld>
             <a:endParaRPr kumimoji="1" lang="ja-JP" altLang="en-US"/>
           </a:p>
@@ -3439,7 +3440,7 @@
           <a:p>
             <a:fld id="{E9CC885B-4903-4D54-9A93-00025F12DED9}" type="datetimeFigureOut">
               <a:rPr kumimoji="1" lang="ja-JP" altLang="en-US" smtClean="0"/>
-              <a:t>2024/11/5</a:t>
+              <a:t>2026/2/19</a:t>
             </a:fld>
             <a:endParaRPr kumimoji="1" lang="ja-JP" altLang="en-US"/>
           </a:p>
@@ -3712,7 +3713,7 @@
           <a:p>
             <a:fld id="{E9CC885B-4903-4D54-9A93-00025F12DED9}" type="datetimeFigureOut">
               <a:rPr kumimoji="1" lang="ja-JP" altLang="en-US" smtClean="0"/>
-              <a:t>2024/11/5</a:t>
+              <a:t>2026/2/19</a:t>
             </a:fld>
             <a:endParaRPr kumimoji="1" lang="ja-JP" altLang="en-US"/>
           </a:p>
@@ -4697,8 +4698,8 @@
             </mc:Fallback>
           </mc:AlternateContent>
         </p:grpSp>
-        <mc:AlternateContent xmlns:mc="http://schemas.openxmlformats.org/markup-compatibility/2006">
-          <mc:Choice xmlns:a14="http://schemas.microsoft.com/office/drawing/2010/main" Requires="a14">
+        <mc:AlternateContent xmlns:mc="http://schemas.openxmlformats.org/markup-compatibility/2006" xmlns:a14="http://schemas.microsoft.com/office/drawing/2010/main">
+          <mc:Choice Requires="a14">
             <p:sp>
               <p:nvSpPr>
                 <p:cNvPr id="34" name="テキスト ボックス 33">
@@ -4845,7 +4846,7 @@
               </p:txBody>
             </p:sp>
           </mc:Choice>
-          <mc:Fallback>
+          <mc:Fallback xmlns="">
             <p:sp>
               <p:nvSpPr>
                 <p:cNvPr id="34" name="テキスト ボックス 33">
@@ -5162,8 +5163,8 @@
             </a:p>
           </p:txBody>
         </p:sp>
-        <mc:AlternateContent xmlns:mc="http://schemas.openxmlformats.org/markup-compatibility/2006">
-          <mc:Choice xmlns:a14="http://schemas.microsoft.com/office/drawing/2010/main" Requires="a14">
+        <mc:AlternateContent xmlns:mc="http://schemas.openxmlformats.org/markup-compatibility/2006" xmlns:a14="http://schemas.microsoft.com/office/drawing/2010/main">
+          <mc:Choice Requires="a14">
             <p:sp>
               <p:nvSpPr>
                 <p:cNvPr id="41" name="テキスト ボックス 40">
@@ -5216,7 +5217,7 @@
               </p:txBody>
             </p:sp>
           </mc:Choice>
-          <mc:Fallback>
+          <mc:Fallback xmlns="">
             <p:sp>
               <p:nvSpPr>
                 <p:cNvPr id="41" name="テキスト ボックス 40">
@@ -5261,8 +5262,8 @@
             </p:sp>
           </mc:Fallback>
         </mc:AlternateContent>
-        <mc:AlternateContent xmlns:mc="http://schemas.openxmlformats.org/markup-compatibility/2006">
-          <mc:Choice xmlns:a14="http://schemas.microsoft.com/office/drawing/2010/main" Requires="a14">
+        <mc:AlternateContent xmlns:mc="http://schemas.openxmlformats.org/markup-compatibility/2006" xmlns:a14="http://schemas.microsoft.com/office/drawing/2010/main">
+          <mc:Choice Requires="a14">
             <p:sp>
               <p:nvSpPr>
                 <p:cNvPr id="42" name="テキスト ボックス 41">
@@ -5315,7 +5316,7 @@
               </p:txBody>
             </p:sp>
           </mc:Choice>
-          <mc:Fallback>
+          <mc:Fallback xmlns="">
             <p:sp>
               <p:nvSpPr>
                 <p:cNvPr id="42" name="テキスト ボックス 41">
@@ -5360,8 +5361,8 @@
             </p:sp>
           </mc:Fallback>
         </mc:AlternateContent>
-        <mc:AlternateContent xmlns:mc="http://schemas.openxmlformats.org/markup-compatibility/2006">
-          <mc:Choice xmlns:a14="http://schemas.microsoft.com/office/drawing/2010/main" Requires="a14">
+        <mc:AlternateContent xmlns:mc="http://schemas.openxmlformats.org/markup-compatibility/2006" xmlns:a14="http://schemas.microsoft.com/office/drawing/2010/main">
+          <mc:Choice Requires="a14">
             <p:sp>
               <p:nvSpPr>
                 <p:cNvPr id="43" name="テキスト ボックス 42">
@@ -5411,7 +5412,7 @@
               </p:txBody>
             </p:sp>
           </mc:Choice>
-          <mc:Fallback>
+          <mc:Fallback xmlns="">
             <p:sp>
               <p:nvSpPr>
                 <p:cNvPr id="43" name="テキスト ボックス 42">
@@ -5537,7 +5538,7 @@
         <p:spPr>
           <a:xfrm>
             <a:off x="567542" y="1216429"/>
-            <a:ext cx="8695009" cy="2677656"/>
+            <a:ext cx="5189241" cy="461665"/>
           </a:xfrm>
           <a:prstGeom prst="rect">
             <a:avLst/>
@@ -5551,129 +5552,55 @@
           <a:lstStyle/>
           <a:p>
             <a:r>
+              <a:rPr kumimoji="1" lang="en-US" altLang="ja-JP" sz="2400" b="1" dirty="0">
+                <a:solidFill>
+                  <a:srgbClr val="FF0000"/>
+                </a:solidFill>
+              </a:rPr>
+              <a:t>CircleMoveBlock.cpp</a:t>
+            </a:r>
+            <a:r>
               <a:rPr kumimoji="1" lang="ja-JP" altLang="en-US" sz="2400" dirty="0"/>
-              <a:t>必要な変数は用意してあります。</a:t>
-            </a:r>
-            <a:endParaRPr kumimoji="1" lang="en-US" altLang="ja-JP" sz="2400" dirty="0"/>
-          </a:p>
-          <a:p>
-            <a:endParaRPr lang="en-US" altLang="ja-JP" sz="2400" dirty="0"/>
-          </a:p>
-          <a:p>
-            <a:r>
-              <a:rPr kumimoji="1" lang="ja-JP" altLang="en-US" sz="2400" dirty="0"/>
-              <a:t>・</a:t>
-            </a:r>
-            <a:r>
-              <a:rPr kumimoji="1" lang="en-US" altLang="ja-JP" sz="2400" dirty="0" err="1"/>
-              <a:t>g_MoveBlockData.posX</a:t>
-            </a:r>
-            <a:r>
-              <a:rPr kumimoji="1" lang="en-US" altLang="ja-JP" sz="2400" dirty="0"/>
-              <a:t>		</a:t>
-            </a:r>
-            <a:r>
-              <a:rPr kumimoji="1" lang="ja-JP" altLang="en-US" sz="2400" dirty="0"/>
-              <a:t>・・・床の座標</a:t>
-            </a:r>
-            <a:r>
-              <a:rPr kumimoji="1" lang="en-US" altLang="ja-JP" sz="2400" dirty="0"/>
-              <a:t>X</a:t>
-            </a:r>
-          </a:p>
-          <a:p>
-            <a:r>
-              <a:rPr kumimoji="1" lang="ja-JP" altLang="en-US" sz="2400" dirty="0"/>
-              <a:t>・</a:t>
-            </a:r>
-            <a:r>
-              <a:rPr kumimoji="1" lang="en-US" altLang="ja-JP" sz="2400" dirty="0" err="1"/>
-              <a:t>g_MoveBlockData.posY</a:t>
-            </a:r>
-            <a:r>
-              <a:rPr kumimoji="1" lang="en-US" altLang="ja-JP" sz="2400" dirty="0"/>
-              <a:t>		</a:t>
-            </a:r>
-            <a:r>
-              <a:rPr kumimoji="1" lang="ja-JP" altLang="en-US" sz="2400" dirty="0"/>
-              <a:t>・・・床の座標</a:t>
-            </a:r>
-            <a:r>
-              <a:rPr kumimoji="1" lang="en-US" altLang="ja-JP" sz="2400" dirty="0"/>
-              <a:t>Y</a:t>
-            </a:r>
-            <a:endParaRPr lang="en-US" altLang="ja-JP" sz="2400" dirty="0"/>
-          </a:p>
-          <a:p>
-            <a:r>
-              <a:rPr kumimoji="1" lang="ja-JP" altLang="en-US" sz="2400" dirty="0"/>
-              <a:t>・</a:t>
-            </a:r>
-            <a:r>
-              <a:rPr kumimoji="1" lang="en-US" altLang="ja-JP" sz="2400" dirty="0" err="1"/>
-              <a:t>g_MoveBlockData.startX</a:t>
-            </a:r>
-            <a:r>
-              <a:rPr kumimoji="1" lang="en-US" altLang="ja-JP" sz="2400" dirty="0"/>
-              <a:t>	</a:t>
-            </a:r>
-            <a:r>
-              <a:rPr kumimoji="1" lang="ja-JP" altLang="en-US" sz="2400" dirty="0"/>
-              <a:t>・・・円の中心座標</a:t>
-            </a:r>
-            <a:r>
-              <a:rPr kumimoji="1" lang="en-US" altLang="ja-JP" sz="2400" dirty="0"/>
-              <a:t>X</a:t>
-            </a:r>
-          </a:p>
-          <a:p>
-            <a:r>
-              <a:rPr kumimoji="1" lang="ja-JP" altLang="en-US" sz="2400" dirty="0"/>
-              <a:t>・</a:t>
-            </a:r>
-            <a:r>
-              <a:rPr kumimoji="1" lang="en-US" altLang="ja-JP" sz="2400" dirty="0" err="1"/>
-              <a:t>g_MoveBlockData.startY</a:t>
-            </a:r>
-            <a:r>
-              <a:rPr kumimoji="1" lang="en-US" altLang="ja-JP" sz="2400" dirty="0"/>
-              <a:t>	</a:t>
-            </a:r>
-            <a:r>
-              <a:rPr kumimoji="1" lang="ja-JP" altLang="en-US" sz="2400" dirty="0"/>
-              <a:t>・・・円の中心座標</a:t>
-            </a:r>
-            <a:r>
-              <a:rPr kumimoji="1" lang="en-US" altLang="ja-JP" sz="2400" dirty="0"/>
-              <a:t>Y</a:t>
-            </a:r>
-            <a:endParaRPr lang="en-US" altLang="ja-JP" sz="2400" dirty="0"/>
-          </a:p>
-          <a:p>
-            <a:r>
-              <a:rPr kumimoji="1" lang="ja-JP" altLang="en-US" sz="2400" dirty="0"/>
-              <a:t>・</a:t>
-            </a:r>
-            <a:r>
-              <a:rPr kumimoji="1" lang="en-US" altLang="ja-JP" sz="2400" dirty="0" err="1"/>
-              <a:t>g_MoveBlockData.circleAngle</a:t>
-            </a:r>
-            <a:r>
-              <a:rPr kumimoji="1" lang="en-US" altLang="ja-JP" sz="2400" dirty="0"/>
-              <a:t>	</a:t>
-            </a:r>
-            <a:r>
-              <a:rPr kumimoji="1" lang="ja-JP" altLang="en-US" sz="2400" dirty="0"/>
-              <a:t>・・・三角関数に渡す角度</a:t>
+              <a:t>を開きます。</a:t>
             </a:r>
             <a:endParaRPr kumimoji="1" lang="en-US" altLang="ja-JP" sz="2400" dirty="0"/>
           </a:p>
         </p:txBody>
       </p:sp>
+      <p:pic>
+        <p:nvPicPr>
+          <p:cNvPr id="5" name="図 4">
+            <a:extLst>
+              <a:ext uri="{FF2B5EF4-FFF2-40B4-BE49-F238E27FC236}">
+                <a16:creationId xmlns:a16="http://schemas.microsoft.com/office/drawing/2014/main" id="{A8B46035-3FB5-4922-8910-39C06FC854D4}"/>
+              </a:ext>
+            </a:extLst>
+          </p:cNvPr>
+          <p:cNvPicPr>
+            <a:picLocks noChangeAspect="1"/>
+          </p:cNvPicPr>
+          <p:nvPr/>
+        </p:nvPicPr>
+        <p:blipFill>
+          <a:blip r:embed="rId2"/>
+          <a:stretch>
+            <a:fillRect/>
+          </a:stretch>
+        </p:blipFill>
+        <p:spPr>
+          <a:xfrm>
+            <a:off x="567542" y="1817794"/>
+            <a:ext cx="8830458" cy="4746371"/>
+          </a:xfrm>
+          <a:prstGeom prst="rect">
+            <a:avLst/>
+          </a:prstGeom>
+        </p:spPr>
+      </p:pic>
     </p:spTree>
     <p:extLst>
       <p:ext uri="{BB962C8B-B14F-4D97-AF65-F5344CB8AC3E}">
-        <p14:creationId xmlns:p14="http://schemas.microsoft.com/office/powerpoint/2010/main" val="1325741714"/>
+        <p14:creationId xmlns:p14="http://schemas.microsoft.com/office/powerpoint/2010/main" val="4243093328"/>
       </p:ext>
     </p:extLst>
   </p:cSld>
@@ -5750,7 +5677,7 @@
         <p:spPr>
           <a:xfrm>
             <a:off x="567542" y="1216429"/>
-            <a:ext cx="6957354" cy="461665"/>
+            <a:ext cx="6647974" cy="461665"/>
           </a:xfrm>
           <a:prstGeom prst="rect">
             <a:avLst/>
@@ -5764,22 +5691,10 @@
           <a:lstStyle/>
           <a:p>
             <a:r>
-              <a:rPr kumimoji="1" lang="en-US" altLang="ja-JP" sz="2400" dirty="0"/>
-              <a:t>MoveBlock.cpp</a:t>
-            </a:r>
-            <a:r>
               <a:rPr kumimoji="1" lang="ja-JP" altLang="en-US" sz="2400" dirty="0"/>
-              <a:t>の以下の空白を</a:t>
-            </a:r>
-            <a:r>
-              <a:rPr kumimoji="1" lang="ja-JP" altLang="en-US" sz="2400"/>
-              <a:t>埋めていきます</a:t>
-            </a:r>
-            <a:r>
-              <a:rPr lang="ja-JP" altLang="en-US" sz="2400" dirty="0"/>
-              <a:t>。</a:t>
-            </a:r>
-            <a:endParaRPr kumimoji="1" lang="en-US" altLang="ja-JP" sz="2400"/>
+              <a:t>前回同様に三角関数に渡す角度を用意します。</a:t>
+            </a:r>
+            <a:endParaRPr kumimoji="1" lang="en-US" altLang="ja-JP" sz="2400" dirty="0"/>
           </a:p>
         </p:txBody>
       </p:sp>
@@ -5788,7 +5703,7 @@
           <p:cNvPr id="3" name="図 2">
             <a:extLst>
               <a:ext uri="{FF2B5EF4-FFF2-40B4-BE49-F238E27FC236}">
-                <a16:creationId xmlns:a16="http://schemas.microsoft.com/office/drawing/2014/main" id="{DEDC424D-C446-4EC1-AAED-426FB693A9D2}"/>
+                <a16:creationId xmlns:a16="http://schemas.microsoft.com/office/drawing/2014/main" id="{A0EE9AF4-A6D2-4B80-B3A3-25B8AD3F1FA4}"/>
               </a:ext>
             </a:extLst>
           </p:cNvPr>
@@ -5805,8 +5720,8 @@
         </p:blipFill>
         <p:spPr>
           <a:xfrm>
-            <a:off x="567542" y="1817794"/>
-            <a:ext cx="6049254" cy="4624570"/>
+            <a:off x="567541" y="1817793"/>
+            <a:ext cx="6199843" cy="4388273"/>
           </a:xfrm>
           <a:prstGeom prst="rect">
             <a:avLst/>
@@ -5816,7 +5731,7 @@
     </p:spTree>
     <p:extLst>
       <p:ext uri="{BB962C8B-B14F-4D97-AF65-F5344CB8AC3E}">
-        <p14:creationId xmlns:p14="http://schemas.microsoft.com/office/powerpoint/2010/main" val="4243093328"/>
+        <p14:creationId xmlns:p14="http://schemas.microsoft.com/office/powerpoint/2010/main" val="2506462809"/>
       </p:ext>
     </p:extLst>
   </p:cSld>
@@ -5878,325 +5793,2206 @@
           </a:p>
         </p:txBody>
       </p:sp>
-      <mc:AlternateContent xmlns:mc="http://schemas.openxmlformats.org/markup-compatibility/2006">
-        <mc:Choice xmlns:a14="http://schemas.microsoft.com/office/drawing/2010/main" Requires="a14">
+      <p:sp>
+        <p:nvSpPr>
+          <p:cNvPr id="6" name="テキスト ボックス 5">
+            <a:extLst>
+              <a:ext uri="{FF2B5EF4-FFF2-40B4-BE49-F238E27FC236}">
+                <a16:creationId xmlns:a16="http://schemas.microsoft.com/office/drawing/2014/main" id="{55830AD6-028B-4C4E-80BF-B70DFC1C3A46}"/>
+              </a:ext>
+            </a:extLst>
+          </p:cNvPr>
+          <p:cNvSpPr txBox="1"/>
+          <p:nvPr/>
+        </p:nvSpPr>
+        <p:spPr>
+          <a:xfrm>
+            <a:off x="567542" y="1216429"/>
+            <a:ext cx="10139314" cy="830997"/>
+          </a:xfrm>
+          <a:prstGeom prst="rect">
+            <a:avLst/>
+          </a:prstGeom>
+          <a:noFill/>
+        </p:spPr>
+        <p:txBody>
+          <a:bodyPr wrap="none" rtlCol="0">
+            <a:spAutoFit/>
+          </a:bodyPr>
+          <a:lstStyle/>
+          <a:p>
+            <a:r>
+              <a:rPr lang="ja-JP" altLang="en-US" sz="2400" dirty="0"/>
+              <a:t>単位円は半径</a:t>
+            </a:r>
+            <a:r>
+              <a:rPr lang="en-US" altLang="ja-JP" sz="2400" dirty="0"/>
+              <a:t>1</a:t>
+            </a:r>
+            <a:r>
+              <a:rPr lang="ja-JP" altLang="en-US" sz="2400" dirty="0"/>
+              <a:t>の円です。</a:t>
+            </a:r>
+            <a:endParaRPr lang="en-US" altLang="ja-JP" sz="2400" dirty="0"/>
+          </a:p>
+          <a:p>
+            <a:r>
+              <a:rPr kumimoji="1" lang="ja-JP" altLang="en-US" sz="2400" dirty="0"/>
+              <a:t>つまり単位円を</a:t>
+            </a:r>
+            <a:r>
+              <a:rPr kumimoji="1" lang="en-US" altLang="ja-JP" sz="2400" dirty="0"/>
+              <a:t>100</a:t>
+            </a:r>
+            <a:r>
+              <a:rPr kumimoji="1" lang="ja-JP" altLang="en-US" sz="2400" dirty="0"/>
+              <a:t>倍にすると、半径</a:t>
+            </a:r>
+            <a:r>
+              <a:rPr kumimoji="1" lang="en-US" altLang="ja-JP" sz="2400" dirty="0"/>
+              <a:t>100</a:t>
+            </a:r>
+            <a:r>
+              <a:rPr kumimoji="1" lang="ja-JP" altLang="en-US" sz="2400" dirty="0"/>
+              <a:t>の円上の座標が計算できます。</a:t>
+            </a:r>
+            <a:endParaRPr kumimoji="1" lang="en-US" altLang="ja-JP" sz="2400" dirty="0"/>
+          </a:p>
+        </p:txBody>
+      </p:sp>
+      <p:grpSp>
+        <p:nvGrpSpPr>
+          <p:cNvPr id="44" name="グループ化 43">
+            <a:extLst>
+              <a:ext uri="{FF2B5EF4-FFF2-40B4-BE49-F238E27FC236}">
+                <a16:creationId xmlns:a16="http://schemas.microsoft.com/office/drawing/2014/main" id="{B9059123-FE89-4914-A74C-3AE81DD81A6B}"/>
+              </a:ext>
+            </a:extLst>
+          </p:cNvPr>
+          <p:cNvGrpSpPr/>
+          <p:nvPr/>
+        </p:nvGrpSpPr>
+        <p:grpSpPr>
+          <a:xfrm>
+            <a:off x="567542" y="2980266"/>
+            <a:ext cx="4055258" cy="2500438"/>
+            <a:chOff x="567542" y="1817794"/>
+            <a:chExt cx="5304532" cy="3240000"/>
+          </a:xfrm>
+        </p:grpSpPr>
+        <p:grpSp>
+          <p:nvGrpSpPr>
+            <p:cNvPr id="29" name="グループ化 28">
+              <a:extLst>
+                <a:ext uri="{FF2B5EF4-FFF2-40B4-BE49-F238E27FC236}">
+                  <a16:creationId xmlns:a16="http://schemas.microsoft.com/office/drawing/2014/main" id="{83CA7FE6-B955-49F2-8301-C9406554F598}"/>
+                </a:ext>
+              </a:extLst>
+            </p:cNvPr>
+            <p:cNvGrpSpPr/>
+            <p:nvPr/>
+          </p:nvGrpSpPr>
+          <p:grpSpPr>
+            <a:xfrm>
+              <a:off x="567542" y="1817794"/>
+              <a:ext cx="3240000" cy="3240000"/>
+              <a:chOff x="567542" y="1817794"/>
+              <a:chExt cx="3240000" cy="3240000"/>
+            </a:xfrm>
+          </p:grpSpPr>
           <p:sp>
             <p:nvSpPr>
-              <p:cNvPr id="6" name="テキスト ボックス 5">
+              <p:cNvPr id="30" name="楕円 29">
                 <a:extLst>
                   <a:ext uri="{FF2B5EF4-FFF2-40B4-BE49-F238E27FC236}">
-                    <a16:creationId xmlns:a16="http://schemas.microsoft.com/office/drawing/2014/main" id="{55830AD6-028B-4C4E-80BF-B70DFC1C3A46}"/>
+                    <a16:creationId xmlns:a16="http://schemas.microsoft.com/office/drawing/2014/main" id="{1E155291-B18B-40EB-A703-470BDEAA75BE}"/>
                   </a:ext>
                 </a:extLst>
               </p:cNvPr>
-              <p:cNvSpPr txBox="1"/>
+              <p:cNvSpPr/>
               <p:nvPr/>
             </p:nvSpPr>
             <p:spPr>
               <a:xfrm>
-                <a:off x="567542" y="1216429"/>
-                <a:ext cx="7725320" cy="3062633"/>
+                <a:off x="567542" y="1817794"/>
+                <a:ext cx="3240000" cy="3240000"/>
               </a:xfrm>
-              <a:prstGeom prst="rect">
+              <a:prstGeom prst="ellipse">
                 <a:avLst/>
               </a:prstGeom>
               <a:noFill/>
             </p:spPr>
+            <p:style>
+              <a:lnRef idx="2">
+                <a:schemeClr val="accent1">
+                  <a:shade val="50000"/>
+                </a:schemeClr>
+              </a:lnRef>
+              <a:fillRef idx="1">
+                <a:schemeClr val="accent1"/>
+              </a:fillRef>
+              <a:effectRef idx="0">
+                <a:schemeClr val="accent1"/>
+              </a:effectRef>
+              <a:fontRef idx="minor">
+                <a:schemeClr val="lt1"/>
+              </a:fontRef>
+            </p:style>
             <p:txBody>
-              <a:bodyPr wrap="none" rtlCol="0">
-                <a:spAutoFit/>
-              </a:bodyPr>
+              <a:bodyPr rtlCol="0" anchor="ctr"/>
               <a:lstStyle/>
               <a:p>
-                <a:r>
-                  <a:rPr kumimoji="1" lang="ja-JP" altLang="en-US" sz="2400" dirty="0"/>
-                  <a:t>床の座標は以下の通りに計算できます。</a:t>
-                </a:r>
-                <a:endParaRPr kumimoji="1" lang="en-US" altLang="ja-JP" sz="2400" dirty="0"/>
+                <a:pPr algn="ctr"/>
+                <a:endParaRPr kumimoji="1" lang="ja-JP" altLang="en-US"/>
               </a:p>
+            </p:txBody>
+          </p:sp>
+          <p:cxnSp>
+            <p:nvCxnSpPr>
+              <p:cNvPr id="31" name="直線コネクタ 30">
+                <a:extLst>
+                  <a:ext uri="{FF2B5EF4-FFF2-40B4-BE49-F238E27FC236}">
+                    <a16:creationId xmlns:a16="http://schemas.microsoft.com/office/drawing/2014/main" id="{4A77D209-A034-455C-A304-F1904F8C6335}"/>
+                  </a:ext>
+                </a:extLst>
+              </p:cNvPr>
+              <p:cNvCxnSpPr>
+                <a:cxnSpLocks/>
+                <a:stCxn id="30" idx="7"/>
+              </p:cNvCxnSpPr>
+              <p:nvPr/>
+            </p:nvCxnSpPr>
+            <p:spPr>
+              <a:xfrm flipH="1">
+                <a:off x="2187543" y="2292281"/>
+                <a:ext cx="1145512" cy="1145512"/>
+              </a:xfrm>
+              <a:prstGeom prst="line">
+                <a:avLst/>
+              </a:prstGeom>
+            </p:spPr>
+            <p:style>
+              <a:lnRef idx="1">
+                <a:schemeClr val="accent1"/>
+              </a:lnRef>
+              <a:fillRef idx="0">
+                <a:schemeClr val="accent1"/>
+              </a:fillRef>
+              <a:effectRef idx="0">
+                <a:schemeClr val="accent1"/>
+              </a:effectRef>
+              <a:fontRef idx="minor">
+                <a:schemeClr val="tx1"/>
+              </a:fontRef>
+            </p:style>
+          </p:cxnSp>
+          <p:sp>
+            <p:nvSpPr>
+              <p:cNvPr id="32" name="楕円 31">
+                <a:extLst>
+                  <a:ext uri="{FF2B5EF4-FFF2-40B4-BE49-F238E27FC236}">
+                    <a16:creationId xmlns:a16="http://schemas.microsoft.com/office/drawing/2014/main" id="{D7CD3EBD-FE94-409F-8421-E07EAFDE1F84}"/>
+                  </a:ext>
+                </a:extLst>
+              </p:cNvPr>
+              <p:cNvSpPr/>
+              <p:nvPr/>
+            </p:nvSpPr>
+            <p:spPr>
+              <a:xfrm>
+                <a:off x="2172745" y="3389152"/>
+                <a:ext cx="72000" cy="72000"/>
+              </a:xfrm>
+              <a:prstGeom prst="ellipse">
+                <a:avLst/>
+              </a:prstGeom>
+            </p:spPr>
+            <p:style>
+              <a:lnRef idx="2">
+                <a:schemeClr val="accent1">
+                  <a:shade val="50000"/>
+                </a:schemeClr>
+              </a:lnRef>
+              <a:fillRef idx="1">
+                <a:schemeClr val="accent1"/>
+              </a:fillRef>
+              <a:effectRef idx="0">
+                <a:schemeClr val="accent1"/>
+              </a:effectRef>
+              <a:fontRef idx="minor">
+                <a:schemeClr val="lt1"/>
+              </a:fontRef>
+            </p:style>
+            <p:txBody>
+              <a:bodyPr rtlCol="0" anchor="ctr"/>
+              <a:lstStyle/>
               <a:p>
-                <a:endParaRPr lang="en-US" altLang="ja-JP" sz="2400" dirty="0"/>
+                <a:pPr algn="ctr"/>
+                <a:endParaRPr kumimoji="1" lang="ja-JP" altLang="en-US" dirty="0"/>
               </a:p>
-              <a:p>
-                <a:r>
-                  <a:rPr kumimoji="1" lang="ja-JP" altLang="en-US" sz="2400" dirty="0"/>
-                  <a:t> </a:t>
-                </a:r>
-                <a14:m>
-                  <m:oMath xmlns:m="http://schemas.openxmlformats.org/officeDocument/2006/math">
-                    <m:r>
-                      <a:rPr kumimoji="1" lang="ja-JP" altLang="en-US" sz="2400" i="1" dirty="0" smtClean="0">
-                        <a:latin typeface="Cambria Math" panose="02040503050406030204" pitchFamily="18" charset="0"/>
+            </p:txBody>
+          </p:sp>
+          <mc:AlternateContent xmlns:mc="http://schemas.openxmlformats.org/markup-compatibility/2006">
+            <mc:Choice xmlns:a14="http://schemas.microsoft.com/office/drawing/2010/main" Requires="a14">
+              <p:sp>
+                <p:nvSpPr>
+                  <p:cNvPr id="33" name="テキスト ボックス 32">
+                    <a:extLst>
+                      <a:ext uri="{FF2B5EF4-FFF2-40B4-BE49-F238E27FC236}">
+                        <a16:creationId xmlns:a16="http://schemas.microsoft.com/office/drawing/2014/main" id="{CFA261DB-568D-4113-966A-B7D350E25559}"/>
+                      </a:ext>
+                    </a:extLst>
+                  </p:cNvPr>
+                  <p:cNvSpPr txBox="1"/>
+                  <p:nvPr/>
+                </p:nvSpPr>
+                <p:spPr>
+                  <a:xfrm>
+                    <a:off x="2473570" y="2462791"/>
+                    <a:ext cx="378631" cy="369332"/>
+                  </a:xfrm>
+                  <a:prstGeom prst="rect">
+                    <a:avLst/>
+                  </a:prstGeom>
+                  <a:noFill/>
+                </p:spPr>
+                <p:txBody>
+                  <a:bodyPr wrap="none" rtlCol="0">
+                    <a:spAutoFit/>
+                  </a:bodyPr>
+                  <a:lstStyle/>
+                  <a:p>
+                    <a:pPr/>
+                    <a14:m>
+                      <m:oMathPara xmlns:m="http://schemas.openxmlformats.org/officeDocument/2006/math">
+                        <m:oMathParaPr>
+                          <m:jc m:val="centerGroup"/>
+                        </m:oMathParaPr>
+                        <m:oMath xmlns:m="http://schemas.openxmlformats.org/officeDocument/2006/math">
+                          <m:r>
+                            <a:rPr lang="en-US" altLang="ja-JP" b="0" i="1" smtClean="0">
+                              <a:latin typeface="Cambria Math" panose="02040503050406030204" pitchFamily="18" charset="0"/>
+                            </a:rPr>
+                            <m:t>1</m:t>
+                          </m:r>
+                        </m:oMath>
+                      </m:oMathPara>
+                    </a14:m>
+                    <a:endParaRPr lang="en-US" altLang="ja-JP" sz="2400" b="0" dirty="0"/>
+                  </a:p>
+                </p:txBody>
+              </p:sp>
+            </mc:Choice>
+            <mc:Fallback>
+              <p:sp>
+                <p:nvSpPr>
+                  <p:cNvPr id="33" name="テキスト ボックス 32">
+                    <a:extLst>
+                      <a:ext uri="{FF2B5EF4-FFF2-40B4-BE49-F238E27FC236}">
+                        <a16:creationId xmlns:a16="http://schemas.microsoft.com/office/drawing/2014/main" id="{CFA261DB-568D-4113-966A-B7D350E25559}"/>
+                      </a:ext>
+                    </a:extLst>
+                  </p:cNvPr>
+                  <p:cNvSpPr txBox="1">
+                    <a:spLocks noRot="1" noChangeAspect="1" noMove="1" noResize="1" noEditPoints="1" noAdjustHandles="1" noChangeArrowheads="1" noChangeShapeType="1" noTextEdit="1"/>
+                  </p:cNvSpPr>
+                  <p:nvPr/>
+                </p:nvSpPr>
+                <p:spPr>
+                  <a:xfrm>
+                    <a:off x="2473570" y="2462791"/>
+                    <a:ext cx="378631" cy="369332"/>
+                  </a:xfrm>
+                  <a:prstGeom prst="rect">
+                    <a:avLst/>
+                  </a:prstGeom>
+                  <a:blipFill>
+                    <a:blip r:embed="rId2"/>
+                    <a:stretch>
+                      <a:fillRect r="-4167" b="-21739"/>
+                    </a:stretch>
+                  </a:blipFill>
+                </p:spPr>
+                <p:txBody>
+                  <a:bodyPr/>
+                  <a:lstStyle/>
+                  <a:p>
+                    <a:r>
+                      <a:rPr lang="ja-JP" altLang="en-US">
+                        <a:noFill/>
                       </a:rPr>
-                      <m:t>①</m:t>
-                    </m:r>
-                    <m:r>
-                      <a:rPr kumimoji="1" lang="en-US" altLang="ja-JP" sz="2400" b="0" i="1" dirty="0" smtClean="0">
-                        <a:latin typeface="Cambria Math" panose="02040503050406030204" pitchFamily="18" charset="0"/>
-                      </a:rPr>
-                      <m:t> </m:t>
-                    </m:r>
-                    <m:r>
-                      <a:rPr kumimoji="1" lang="ja-JP" altLang="en-US" sz="2400" i="1" dirty="0" smtClean="0">
-                        <a:latin typeface="Cambria Math" panose="02040503050406030204" pitchFamily="18" charset="0"/>
-                      </a:rPr>
-                      <m:t>床の座標</m:t>
-                    </m:r>
-                    <m:r>
-                      <a:rPr lang="en-US" altLang="ja-JP" sz="2400" i="1" dirty="0" smtClean="0">
-                        <a:latin typeface="Cambria Math" panose="02040503050406030204" pitchFamily="18" charset="0"/>
-                      </a:rPr>
-                      <m:t>𝑋</m:t>
-                    </m:r>
-                    <m:r>
-                      <a:rPr lang="en-US" altLang="ja-JP" sz="2400" i="1" dirty="0" smtClean="0">
-                        <a:latin typeface="Cambria Math" panose="02040503050406030204" pitchFamily="18" charset="0"/>
-                      </a:rPr>
-                      <m:t>=</m:t>
-                    </m:r>
-                    <m:r>
-                      <a:rPr lang="ja-JP" altLang="en-US" sz="2400" i="1" dirty="0" smtClean="0">
-                        <a:latin typeface="Cambria Math" panose="02040503050406030204" pitchFamily="18" charset="0"/>
-                      </a:rPr>
-                      <m:t>円の中心座標</m:t>
-                    </m:r>
-                    <m:r>
-                      <a:rPr lang="en-US" altLang="ja-JP" sz="2400" i="1" dirty="0" err="1" smtClean="0">
-                        <a:latin typeface="Cambria Math" panose="02040503050406030204" pitchFamily="18" charset="0"/>
-                      </a:rPr>
-                      <m:t>𝑋</m:t>
-                    </m:r>
-                    <m:r>
-                      <a:rPr lang="en-US" altLang="ja-JP" sz="2400" i="1" dirty="0" err="1" smtClean="0">
-                        <a:latin typeface="Cambria Math" panose="02040503050406030204" pitchFamily="18" charset="0"/>
-                      </a:rPr>
-                      <m:t>+</m:t>
-                    </m:r>
-                    <m:func>
-                      <m:funcPr>
-                        <m:ctrlPr>
-                          <a:rPr lang="en-US" altLang="ja-JP" sz="2400" i="1" dirty="0" smtClean="0">
+                      <a:t> </a:t>
+                    </a:r>
+                  </a:p>
+                </p:txBody>
+              </p:sp>
+            </mc:Fallback>
+          </mc:AlternateContent>
+        </p:grpSp>
+        <mc:AlternateContent xmlns:mc="http://schemas.openxmlformats.org/markup-compatibility/2006">
+          <mc:Choice xmlns:a14="http://schemas.microsoft.com/office/drawing/2010/main" Requires="a14">
+            <p:sp>
+              <p:nvSpPr>
+                <p:cNvPr id="34" name="テキスト ボックス 33">
+                  <a:extLst>
+                    <a:ext uri="{FF2B5EF4-FFF2-40B4-BE49-F238E27FC236}">
+                      <a16:creationId xmlns:a16="http://schemas.microsoft.com/office/drawing/2014/main" id="{113F36A2-76DA-4BD3-899F-BCE19D99642E}"/>
+                    </a:ext>
+                  </a:extLst>
+                </p:cNvPr>
+                <p:cNvSpPr txBox="1"/>
+                <p:nvPr/>
+              </p:nvSpPr>
+              <p:spPr>
+                <a:xfrm>
+                  <a:off x="3219681" y="1867166"/>
+                  <a:ext cx="2652393" cy="400110"/>
+                </a:xfrm>
+                <a:prstGeom prst="rect">
+                  <a:avLst/>
+                </a:prstGeom>
+                <a:noFill/>
+              </p:spPr>
+              <p:txBody>
+                <a:bodyPr wrap="none" rtlCol="0">
+                  <a:spAutoFit/>
+                </a:bodyPr>
+                <a:lstStyle/>
+                <a:p>
+                  <a:pPr/>
+                  <a14:m>
+                    <m:oMathPara xmlns:m="http://schemas.openxmlformats.org/officeDocument/2006/math">
+                      <m:oMathParaPr>
+                        <m:jc m:val="centerGroup"/>
+                      </m:oMathParaPr>
+                      <m:oMath xmlns:m="http://schemas.openxmlformats.org/officeDocument/2006/math">
+                        <m:r>
+                          <a:rPr lang="en-US" altLang="ja-JP" sz="2000" b="1" i="1" smtClean="0">
+                            <a:solidFill>
+                              <a:srgbClr val="FF0000"/>
+                            </a:solidFill>
                             <a:latin typeface="Cambria Math" panose="02040503050406030204" pitchFamily="18" charset="0"/>
                           </a:rPr>
-                        </m:ctrlPr>
-                      </m:funcPr>
-                      <m:fName>
+                          <m:t>(</m:t>
+                        </m:r>
+                        <m:r>
+                          <a:rPr lang="en-US" altLang="ja-JP" sz="2000" b="1" i="1" smtClean="0">
+                            <a:solidFill>
+                              <a:srgbClr val="FF0000"/>
+                            </a:solidFill>
+                            <a:latin typeface="Cambria Math" panose="02040503050406030204" pitchFamily="18" charset="0"/>
+                          </a:rPr>
+                          <m:t>𝒙</m:t>
+                        </m:r>
+                        <m:r>
+                          <a:rPr lang="en-US" altLang="ja-JP" sz="2000" b="1" i="1" smtClean="0">
+                            <a:solidFill>
+                              <a:srgbClr val="FF0000"/>
+                            </a:solidFill>
+                            <a:latin typeface="Cambria Math" panose="02040503050406030204" pitchFamily="18" charset="0"/>
+                          </a:rPr>
+                          <m:t>=</m:t>
+                        </m:r>
+                        <m:r>
+                          <a:rPr lang="en-US" altLang="ja-JP" sz="2000" b="1" i="1" smtClean="0">
+                            <a:solidFill>
+                              <a:srgbClr val="FF0000"/>
+                            </a:solidFill>
+                            <a:latin typeface="Cambria Math" panose="02040503050406030204" pitchFamily="18" charset="0"/>
+                          </a:rPr>
+                          <m:t>𝒄𝒐𝒔</m:t>
+                        </m:r>
+                        <m:r>
+                          <a:rPr lang="en-US" altLang="ja-JP" sz="2000" b="1" i="1">
+                            <a:solidFill>
+                              <a:srgbClr val="FF0000"/>
+                            </a:solidFill>
+                            <a:latin typeface="Cambria Math" panose="02040503050406030204" pitchFamily="18" charset="0"/>
+                          </a:rPr>
+                          <m:t>𝜽</m:t>
+                        </m:r>
+                        <m:r>
+                          <a:rPr lang="en-US" altLang="ja-JP" sz="2000" b="1" i="1" smtClean="0">
+                            <a:solidFill>
+                              <a:srgbClr val="FF0000"/>
+                            </a:solidFill>
+                            <a:latin typeface="Cambria Math" panose="02040503050406030204" pitchFamily="18" charset="0"/>
+                          </a:rPr>
+                          <m:t>, </m:t>
+                        </m:r>
+                        <m:r>
+                          <a:rPr lang="en-US" altLang="ja-JP" sz="2000" b="1" i="1" smtClean="0">
+                            <a:solidFill>
+                              <a:srgbClr val="FF0000"/>
+                            </a:solidFill>
+                            <a:latin typeface="Cambria Math" panose="02040503050406030204" pitchFamily="18" charset="0"/>
+                          </a:rPr>
+                          <m:t>𝒚</m:t>
+                        </m:r>
+                        <m:r>
+                          <a:rPr lang="en-US" altLang="ja-JP" sz="2000" b="1" i="1" smtClean="0">
+                            <a:solidFill>
+                              <a:srgbClr val="FF0000"/>
+                            </a:solidFill>
+                            <a:latin typeface="Cambria Math" panose="02040503050406030204" pitchFamily="18" charset="0"/>
+                          </a:rPr>
+                          <m:t>=</m:t>
+                        </m:r>
+                        <m:r>
+                          <a:rPr lang="en-US" altLang="ja-JP" sz="2000" b="1" i="1" smtClean="0">
+                            <a:solidFill>
+                              <a:srgbClr val="FF0000"/>
+                            </a:solidFill>
+                            <a:latin typeface="Cambria Math" panose="02040503050406030204" pitchFamily="18" charset="0"/>
+                          </a:rPr>
+                          <m:t>𝒔𝒊𝒏</m:t>
+                        </m:r>
+                        <m:r>
+                          <a:rPr lang="en-US" altLang="ja-JP" sz="2000" b="1" i="1">
+                            <a:solidFill>
+                              <a:srgbClr val="FF0000"/>
+                            </a:solidFill>
+                            <a:latin typeface="Cambria Math" panose="02040503050406030204" pitchFamily="18" charset="0"/>
+                          </a:rPr>
+                          <m:t>𝜽</m:t>
+                        </m:r>
+                        <m:r>
+                          <a:rPr lang="en-US" altLang="ja-JP" sz="2000" b="1" i="1" smtClean="0">
+                            <a:solidFill>
+                              <a:srgbClr val="FF0000"/>
+                            </a:solidFill>
+                            <a:latin typeface="Cambria Math" panose="02040503050406030204" pitchFamily="18" charset="0"/>
+                          </a:rPr>
+                          <m:t>)</m:t>
+                        </m:r>
+                      </m:oMath>
+                    </m:oMathPara>
+                  </a14:m>
+                  <a:endParaRPr lang="en-US" altLang="ja-JP" sz="3200" b="1" dirty="0">
+                    <a:solidFill>
+                      <a:srgbClr val="FF0000"/>
+                    </a:solidFill>
+                  </a:endParaRPr>
+                </a:p>
+              </p:txBody>
+            </p:sp>
+          </mc:Choice>
+          <mc:Fallback>
+            <p:sp>
+              <p:nvSpPr>
+                <p:cNvPr id="34" name="テキスト ボックス 33">
+                  <a:extLst>
+                    <a:ext uri="{FF2B5EF4-FFF2-40B4-BE49-F238E27FC236}">
+                      <a16:creationId xmlns:a16="http://schemas.microsoft.com/office/drawing/2014/main" id="{113F36A2-76DA-4BD3-899F-BCE19D99642E}"/>
+                    </a:ext>
+                  </a:extLst>
+                </p:cNvPr>
+                <p:cNvSpPr txBox="1">
+                  <a:spLocks noRot="1" noChangeAspect="1" noMove="1" noResize="1" noEditPoints="1" noAdjustHandles="1" noChangeArrowheads="1" noChangeShapeType="1" noTextEdit="1"/>
+                </p:cNvSpPr>
+                <p:nvPr/>
+              </p:nvSpPr>
+              <p:spPr>
+                <a:xfrm>
+                  <a:off x="3219681" y="1867166"/>
+                  <a:ext cx="2652393" cy="400110"/>
+                </a:xfrm>
+                <a:prstGeom prst="rect">
+                  <a:avLst/>
+                </a:prstGeom>
+                <a:blipFill>
+                  <a:blip r:embed="rId3"/>
+                  <a:stretch>
+                    <a:fillRect l="-1506" r="-27711" b="-49020"/>
+                  </a:stretch>
+                </a:blipFill>
+              </p:spPr>
+              <p:txBody>
+                <a:bodyPr/>
+                <a:lstStyle/>
+                <a:p>
+                  <a:r>
+                    <a:rPr lang="ja-JP" altLang="en-US">
+                      <a:noFill/>
+                    </a:rPr>
+                    <a:t> </a:t>
+                  </a:r>
+                </a:p>
+              </p:txBody>
+            </p:sp>
+          </mc:Fallback>
+        </mc:AlternateContent>
+        <p:sp>
+          <p:nvSpPr>
+            <p:cNvPr id="35" name="楕円 34">
+              <a:extLst>
+                <a:ext uri="{FF2B5EF4-FFF2-40B4-BE49-F238E27FC236}">
+                  <a16:creationId xmlns:a16="http://schemas.microsoft.com/office/drawing/2014/main" id="{85B74FFA-D226-4D3B-9237-CFBC27A4B944}"/>
+                </a:ext>
+              </a:extLst>
+            </p:cNvPr>
+            <p:cNvSpPr/>
+            <p:nvPr/>
+          </p:nvSpPr>
+          <p:spPr>
+            <a:xfrm>
+              <a:off x="3288482" y="2256638"/>
+              <a:ext cx="72000" cy="72000"/>
+            </a:xfrm>
+            <a:prstGeom prst="ellipse">
+              <a:avLst/>
+            </a:prstGeom>
+          </p:spPr>
+          <p:style>
+            <a:lnRef idx="2">
+              <a:schemeClr val="accent1">
+                <a:shade val="50000"/>
+              </a:schemeClr>
+            </a:lnRef>
+            <a:fillRef idx="1">
+              <a:schemeClr val="accent1"/>
+            </a:fillRef>
+            <a:effectRef idx="0">
+              <a:schemeClr val="accent1"/>
+            </a:effectRef>
+            <a:fontRef idx="minor">
+              <a:schemeClr val="lt1"/>
+            </a:fontRef>
+          </p:style>
+          <p:txBody>
+            <a:bodyPr rtlCol="0" anchor="ctr"/>
+            <a:lstStyle/>
+            <a:p>
+              <a:pPr algn="ctr"/>
+              <a:endParaRPr kumimoji="1" lang="ja-JP" altLang="en-US"/>
+            </a:p>
+          </p:txBody>
+        </p:sp>
+        <p:cxnSp>
+          <p:nvCxnSpPr>
+            <p:cNvPr id="36" name="直線コネクタ 35">
+              <a:extLst>
+                <a:ext uri="{FF2B5EF4-FFF2-40B4-BE49-F238E27FC236}">
+                  <a16:creationId xmlns:a16="http://schemas.microsoft.com/office/drawing/2014/main" id="{F62C9C4B-1E7C-45EC-8F76-D9BA62AAC398}"/>
+                </a:ext>
+              </a:extLst>
+            </p:cNvPr>
+            <p:cNvCxnSpPr>
+              <a:cxnSpLocks/>
+              <a:stCxn id="30" idx="6"/>
+            </p:cNvCxnSpPr>
+            <p:nvPr/>
+          </p:nvCxnSpPr>
+          <p:spPr>
+            <a:xfrm flipH="1" flipV="1">
+              <a:off x="2244746" y="3429000"/>
+              <a:ext cx="1562796" cy="8794"/>
+            </a:xfrm>
+            <a:prstGeom prst="line">
+              <a:avLst/>
+            </a:prstGeom>
+            <a:ln>
+              <a:solidFill>
+                <a:srgbClr val="FF0000"/>
+              </a:solidFill>
+            </a:ln>
+          </p:spPr>
+          <p:style>
+            <a:lnRef idx="1">
+              <a:schemeClr val="accent1"/>
+            </a:lnRef>
+            <a:fillRef idx="0">
+              <a:schemeClr val="accent1"/>
+            </a:fillRef>
+            <a:effectRef idx="0">
+              <a:schemeClr val="accent1"/>
+            </a:effectRef>
+            <a:fontRef idx="minor">
+              <a:schemeClr val="tx1"/>
+            </a:fontRef>
+          </p:style>
+        </p:cxnSp>
+        <p:cxnSp>
+          <p:nvCxnSpPr>
+            <p:cNvPr id="37" name="直線コネクタ 36">
+              <a:extLst>
+                <a:ext uri="{FF2B5EF4-FFF2-40B4-BE49-F238E27FC236}">
+                  <a16:creationId xmlns:a16="http://schemas.microsoft.com/office/drawing/2014/main" id="{EC891A09-659F-4F59-9619-347EFBDA804C}"/>
+                </a:ext>
+              </a:extLst>
+            </p:cNvPr>
+            <p:cNvCxnSpPr>
+              <a:cxnSpLocks/>
+              <a:stCxn id="35" idx="4"/>
+            </p:cNvCxnSpPr>
+            <p:nvPr/>
+          </p:nvCxnSpPr>
+          <p:spPr>
+            <a:xfrm>
+              <a:off x="3324482" y="2328638"/>
+              <a:ext cx="8573" cy="1104759"/>
+            </a:xfrm>
+            <a:prstGeom prst="line">
+              <a:avLst/>
+            </a:prstGeom>
+            <a:ln>
+              <a:solidFill>
+                <a:srgbClr val="00B050"/>
+              </a:solidFill>
+            </a:ln>
+          </p:spPr>
+          <p:style>
+            <a:lnRef idx="1">
+              <a:schemeClr val="accent1"/>
+            </a:lnRef>
+            <a:fillRef idx="0">
+              <a:schemeClr val="accent1"/>
+            </a:fillRef>
+            <a:effectRef idx="0">
+              <a:schemeClr val="accent1"/>
+            </a:effectRef>
+            <a:fontRef idx="minor">
+              <a:schemeClr val="tx1"/>
+            </a:fontRef>
+          </p:style>
+        </p:cxnSp>
+        <p:cxnSp>
+          <p:nvCxnSpPr>
+            <p:cNvPr id="38" name="直線コネクタ 37">
+              <a:extLst>
+                <a:ext uri="{FF2B5EF4-FFF2-40B4-BE49-F238E27FC236}">
+                  <a16:creationId xmlns:a16="http://schemas.microsoft.com/office/drawing/2014/main" id="{E1261AB9-070C-4228-B056-5C9D0432FFDB}"/>
+                </a:ext>
+              </a:extLst>
+            </p:cNvPr>
+            <p:cNvCxnSpPr>
+              <a:cxnSpLocks/>
+            </p:cNvCxnSpPr>
+            <p:nvPr/>
+          </p:nvCxnSpPr>
+          <p:spPr>
+            <a:xfrm>
+              <a:off x="3211472" y="3345656"/>
+              <a:ext cx="0" cy="87741"/>
+            </a:xfrm>
+            <a:prstGeom prst="line">
+              <a:avLst/>
+            </a:prstGeom>
+            <a:ln>
+              <a:solidFill>
+                <a:schemeClr val="tx1"/>
+              </a:solidFill>
+            </a:ln>
+          </p:spPr>
+          <p:style>
+            <a:lnRef idx="1">
+              <a:schemeClr val="accent1"/>
+            </a:lnRef>
+            <a:fillRef idx="0">
+              <a:schemeClr val="accent1"/>
+            </a:fillRef>
+            <a:effectRef idx="0">
+              <a:schemeClr val="accent1"/>
+            </a:effectRef>
+            <a:fontRef idx="minor">
+              <a:schemeClr val="tx1"/>
+            </a:fontRef>
+          </p:style>
+        </p:cxnSp>
+        <p:cxnSp>
+          <p:nvCxnSpPr>
+            <p:cNvPr id="39" name="直線コネクタ 38">
+              <a:extLst>
+                <a:ext uri="{FF2B5EF4-FFF2-40B4-BE49-F238E27FC236}">
+                  <a16:creationId xmlns:a16="http://schemas.microsoft.com/office/drawing/2014/main" id="{67555AD7-61DC-49E6-9334-39A753E16E6D}"/>
+                </a:ext>
+              </a:extLst>
+            </p:cNvPr>
+            <p:cNvCxnSpPr>
+              <a:cxnSpLocks/>
+            </p:cNvCxnSpPr>
+            <p:nvPr/>
+          </p:nvCxnSpPr>
+          <p:spPr>
+            <a:xfrm>
+              <a:off x="3211472" y="3345656"/>
+              <a:ext cx="121583" cy="0"/>
+            </a:xfrm>
+            <a:prstGeom prst="line">
+              <a:avLst/>
+            </a:prstGeom>
+            <a:ln>
+              <a:solidFill>
+                <a:schemeClr val="tx1"/>
+              </a:solidFill>
+            </a:ln>
+          </p:spPr>
+          <p:style>
+            <a:lnRef idx="1">
+              <a:schemeClr val="accent1"/>
+            </a:lnRef>
+            <a:fillRef idx="0">
+              <a:schemeClr val="accent1"/>
+            </a:fillRef>
+            <a:effectRef idx="0">
+              <a:schemeClr val="accent1"/>
+            </a:effectRef>
+            <a:fontRef idx="minor">
+              <a:schemeClr val="tx1"/>
+            </a:fontRef>
+          </p:style>
+        </p:cxnSp>
+        <p:sp>
+          <p:nvSpPr>
+            <p:cNvPr id="40" name="円弧 39">
+              <a:extLst>
+                <a:ext uri="{FF2B5EF4-FFF2-40B4-BE49-F238E27FC236}">
+                  <a16:creationId xmlns:a16="http://schemas.microsoft.com/office/drawing/2014/main" id="{6F2FBD4D-267A-47CE-AB8C-717DFC8F1CE5}"/>
+                </a:ext>
+              </a:extLst>
+            </p:cNvPr>
+            <p:cNvSpPr/>
+            <p:nvPr/>
+          </p:nvSpPr>
+          <p:spPr>
+            <a:xfrm>
+              <a:off x="2221842" y="3283015"/>
+              <a:ext cx="211940" cy="272651"/>
+            </a:xfrm>
+            <a:prstGeom prst="arc">
+              <a:avLst>
+                <a:gd name="adj1" fmla="val 16602575"/>
+                <a:gd name="adj2" fmla="val 231423"/>
+              </a:avLst>
+            </a:prstGeom>
+            <a:ln>
+              <a:solidFill>
+                <a:schemeClr val="tx1"/>
+              </a:solidFill>
+            </a:ln>
+          </p:spPr>
+          <p:style>
+            <a:lnRef idx="1">
+              <a:schemeClr val="accent1"/>
+            </a:lnRef>
+            <a:fillRef idx="0">
+              <a:schemeClr val="accent1"/>
+            </a:fillRef>
+            <a:effectRef idx="0">
+              <a:schemeClr val="accent1"/>
+            </a:effectRef>
+            <a:fontRef idx="minor">
+              <a:schemeClr val="tx1"/>
+            </a:fontRef>
+          </p:style>
+          <p:txBody>
+            <a:bodyPr rtlCol="0" anchor="ctr"/>
+            <a:lstStyle/>
+            <a:p>
+              <a:pPr algn="ctr"/>
+              <a:endParaRPr kumimoji="1" lang="ja-JP" altLang="en-US"/>
+            </a:p>
+          </p:txBody>
+        </p:sp>
+        <mc:AlternateContent xmlns:mc="http://schemas.openxmlformats.org/markup-compatibility/2006">
+          <mc:Choice xmlns:a14="http://schemas.microsoft.com/office/drawing/2010/main" Requires="a14">
+            <p:sp>
+              <p:nvSpPr>
+                <p:cNvPr id="41" name="テキスト ボックス 40">
+                  <a:extLst>
+                    <a:ext uri="{FF2B5EF4-FFF2-40B4-BE49-F238E27FC236}">
+                      <a16:creationId xmlns:a16="http://schemas.microsoft.com/office/drawing/2014/main" id="{AAA7AA62-BBC5-4763-BB6D-378E7A77884F}"/>
+                    </a:ext>
+                  </a:extLst>
+                </p:cNvPr>
+                <p:cNvSpPr txBox="1"/>
+                <p:nvPr/>
+              </p:nvSpPr>
+              <p:spPr>
+                <a:xfrm>
+                  <a:off x="2337045" y="3061570"/>
+                  <a:ext cx="377026" cy="369332"/>
+                </a:xfrm>
+                <a:prstGeom prst="rect">
+                  <a:avLst/>
+                </a:prstGeom>
+                <a:noFill/>
+              </p:spPr>
+              <p:txBody>
+                <a:bodyPr wrap="none" rtlCol="0">
+                  <a:spAutoFit/>
+                </a:bodyPr>
+                <a:lstStyle/>
+                <a:p>
+                  <a:pPr/>
+                  <a14:m>
+                    <m:oMathPara xmlns:m="http://schemas.openxmlformats.org/officeDocument/2006/math">
+                      <m:oMathParaPr>
+                        <m:jc m:val="centerGroup"/>
+                      </m:oMathParaPr>
+                      <m:oMath xmlns:m="http://schemas.openxmlformats.org/officeDocument/2006/math">
                         <m:r>
                           <m:rPr>
                             <m:sty m:val="p"/>
                           </m:rPr>
-                          <a:rPr lang="en-US" altLang="ja-JP" sz="2400" i="0" dirty="0" err="1" smtClean="0">
+                          <a:rPr lang="en-US" altLang="ja-JP" i="1">
                             <a:latin typeface="Cambria Math" panose="02040503050406030204" pitchFamily="18" charset="0"/>
                           </a:rPr>
-                          <m:t>cos</m:t>
+                          <m:t>θ</m:t>
                         </m:r>
-                      </m:fName>
-                      <m:e>
-                        <m:d>
-                          <m:dPr>
-                            <m:ctrlPr>
-                              <a:rPr lang="en-US" altLang="ja-JP" sz="2400" i="1" dirty="0" smtClean="0">
-                                <a:latin typeface="Cambria Math" panose="02040503050406030204" pitchFamily="18" charset="0"/>
-                              </a:rPr>
-                            </m:ctrlPr>
-                          </m:dPr>
-                          <m:e>
-                            <m:r>
-                              <a:rPr lang="ja-JP" altLang="en-US" sz="2400" i="1" dirty="0" smtClean="0">
-                                <a:latin typeface="Cambria Math" panose="02040503050406030204" pitchFamily="18" charset="0"/>
-                              </a:rPr>
-                              <m:t>角度</m:t>
-                            </m:r>
-                          </m:e>
-                        </m:d>
-                      </m:e>
-                    </m:func>
-                    <m:r>
-                      <a:rPr lang="en-US" altLang="ja-JP" sz="2400" i="1" dirty="0" smtClean="0">
-                        <a:latin typeface="Cambria Math" panose="02040503050406030204" pitchFamily="18" charset="0"/>
-                      </a:rPr>
-                      <m:t>∗</m:t>
-                    </m:r>
-                    <m:r>
-                      <a:rPr lang="ja-JP" altLang="en-US" sz="2400" i="1" dirty="0" smtClean="0">
-                        <a:latin typeface="Cambria Math" panose="02040503050406030204" pitchFamily="18" charset="0"/>
-                      </a:rPr>
-                      <m:t>円の半径</m:t>
-                    </m:r>
-                  </m:oMath>
-                </a14:m>
-                <a:endParaRPr lang="en-US" altLang="ja-JP" sz="2400" i="1" dirty="0">
-                  <a:latin typeface="Cambria Math" panose="02040503050406030204" pitchFamily="18" charset="0"/>
-                </a:endParaRPr>
-              </a:p>
-              <a:p>
-                <a:r>
-                  <a:rPr kumimoji="1" lang="ja-JP" altLang="en-US" sz="2400" dirty="0"/>
-                  <a:t> </a:t>
-                </a:r>
-                <a14:m>
-                  <m:oMath xmlns:m="http://schemas.openxmlformats.org/officeDocument/2006/math">
-                    <m:r>
-                      <a:rPr kumimoji="1" lang="ja-JP" altLang="en-US" sz="2400" i="1" dirty="0">
-                        <a:latin typeface="Cambria Math" panose="02040503050406030204" pitchFamily="18" charset="0"/>
-                      </a:rPr>
-                      <m:t>②</m:t>
-                    </m:r>
-                    <m:r>
-                      <a:rPr kumimoji="1" lang="en-US" altLang="ja-JP" sz="2400" b="0" i="1" dirty="0" smtClean="0">
-                        <a:latin typeface="Cambria Math" panose="02040503050406030204" pitchFamily="18" charset="0"/>
-                      </a:rPr>
-                      <m:t> </m:t>
-                    </m:r>
-                    <m:r>
-                      <a:rPr kumimoji="1" lang="ja-JP" altLang="en-US" sz="2400" i="1" dirty="0" smtClean="0">
-                        <a:latin typeface="Cambria Math" panose="02040503050406030204" pitchFamily="18" charset="0"/>
-                      </a:rPr>
-                      <m:t>床の座標</m:t>
-                    </m:r>
-                    <m:r>
-                      <a:rPr lang="en-US" altLang="ja-JP" sz="2400" i="1" dirty="0" smtClean="0">
-                        <a:latin typeface="Cambria Math" panose="02040503050406030204" pitchFamily="18" charset="0"/>
-                      </a:rPr>
-                      <m:t>𝑌</m:t>
-                    </m:r>
-                    <m:r>
-                      <a:rPr lang="en-US" altLang="ja-JP" sz="2400" i="1" dirty="0" smtClean="0">
-                        <a:latin typeface="Cambria Math" panose="02040503050406030204" pitchFamily="18" charset="0"/>
-                      </a:rPr>
-                      <m:t>=</m:t>
-                    </m:r>
-                    <m:r>
-                      <a:rPr lang="ja-JP" altLang="en-US" sz="2400" i="1" dirty="0" smtClean="0">
-                        <a:latin typeface="Cambria Math" panose="02040503050406030204" pitchFamily="18" charset="0"/>
-                      </a:rPr>
-                      <m:t>円の中心座標</m:t>
-                    </m:r>
-                    <m:r>
-                      <a:rPr lang="en-US" altLang="ja-JP" sz="2400" i="1" dirty="0" err="1" smtClean="0">
-                        <a:latin typeface="Cambria Math" panose="02040503050406030204" pitchFamily="18" charset="0"/>
-                      </a:rPr>
-                      <m:t>𝑌</m:t>
-                    </m:r>
-                    <m:r>
-                      <a:rPr lang="en-US" altLang="ja-JP" sz="2400" i="1" dirty="0" err="1" smtClean="0">
-                        <a:latin typeface="Cambria Math" panose="02040503050406030204" pitchFamily="18" charset="0"/>
-                      </a:rPr>
-                      <m:t>+</m:t>
-                    </m:r>
-                    <m:r>
-                      <m:rPr>
-                        <m:sty m:val="p"/>
-                      </m:rPr>
-                      <a:rPr lang="en-US" altLang="ja-JP" sz="2400" i="1" dirty="0" err="1" smtClean="0">
-                        <a:latin typeface="Cambria Math" panose="02040503050406030204" pitchFamily="18" charset="0"/>
-                      </a:rPr>
-                      <m:t>sin</m:t>
-                    </m:r>
-                    <m:r>
-                      <a:rPr lang="en-US" altLang="ja-JP" sz="2400" i="1" dirty="0" smtClean="0">
-                        <a:latin typeface="Cambria Math" panose="02040503050406030204" pitchFamily="18" charset="0"/>
-                      </a:rPr>
-                      <m:t>⁡(</m:t>
-                    </m:r>
-                    <m:r>
-                      <a:rPr lang="ja-JP" altLang="en-US" sz="2400" i="1" dirty="0" smtClean="0">
-                        <a:latin typeface="Cambria Math" panose="02040503050406030204" pitchFamily="18" charset="0"/>
-                      </a:rPr>
-                      <m:t>角度</m:t>
-                    </m:r>
-                    <m:r>
-                      <a:rPr lang="en-US" altLang="ja-JP" sz="2400" i="1" dirty="0" smtClean="0">
-                        <a:latin typeface="Cambria Math" panose="02040503050406030204" pitchFamily="18" charset="0"/>
-                      </a:rPr>
-                      <m:t>)∗</m:t>
-                    </m:r>
-                    <m:r>
-                      <a:rPr lang="ja-JP" altLang="en-US" sz="2400" i="1" dirty="0" smtClean="0">
-                        <a:latin typeface="Cambria Math" panose="02040503050406030204" pitchFamily="18" charset="0"/>
-                      </a:rPr>
-                      <m:t>円の半径</m:t>
-                    </m:r>
-                  </m:oMath>
-                </a14:m>
-                <a:endParaRPr lang="en-US" altLang="ja-JP" sz="2400" dirty="0"/>
-              </a:p>
-              <a:p>
-                <a:endParaRPr kumimoji="1" lang="en-US" altLang="ja-JP" sz="2400" dirty="0"/>
-              </a:p>
-              <a:p>
-                <a:r>
-                  <a:rPr kumimoji="1" lang="ja-JP" altLang="en-US" sz="2400" dirty="0"/>
-                  <a:t>それぞれ変数をあてはめましょう。</a:t>
-                </a:r>
-                <a:endParaRPr kumimoji="1" lang="en-US" altLang="ja-JP" sz="2400" dirty="0"/>
-              </a:p>
-              <a:p>
-                <a:endParaRPr lang="en-US" altLang="ja-JP" sz="2400" dirty="0"/>
-              </a:p>
-              <a:p>
-                <a:r>
-                  <a:rPr kumimoji="1" lang="en-US" altLang="ja-JP" sz="2400" dirty="0"/>
-                  <a:t>※</a:t>
-                </a:r>
-                <a:r>
-                  <a:rPr kumimoji="1" lang="ja-JP" altLang="en-US" sz="2400" dirty="0"/>
-                  <a:t>座学の三角関数や単位円を振り返ってみましょう。</a:t>
-                </a:r>
-                <a:endParaRPr kumimoji="1" lang="en-US" altLang="ja-JP" sz="2400" dirty="0"/>
-              </a:p>
-            </p:txBody>
-          </p:sp>
-        </mc:Choice>
-        <mc:Fallback>
+                      </m:oMath>
+                    </m:oMathPara>
+                  </a14:m>
+                  <a:endParaRPr lang="en-US" altLang="ja-JP" sz="2400" b="0" dirty="0"/>
+                </a:p>
+              </p:txBody>
+            </p:sp>
+          </mc:Choice>
+          <mc:Fallback>
+            <p:sp>
+              <p:nvSpPr>
+                <p:cNvPr id="41" name="テキスト ボックス 40">
+                  <a:extLst>
+                    <a:ext uri="{FF2B5EF4-FFF2-40B4-BE49-F238E27FC236}">
+                      <a16:creationId xmlns:a16="http://schemas.microsoft.com/office/drawing/2014/main" id="{AAA7AA62-BBC5-4763-BB6D-378E7A77884F}"/>
+                    </a:ext>
+                  </a:extLst>
+                </p:cNvPr>
+                <p:cNvSpPr txBox="1">
+                  <a:spLocks noRot="1" noChangeAspect="1" noMove="1" noResize="1" noEditPoints="1" noAdjustHandles="1" noChangeArrowheads="1" noChangeShapeType="1" noTextEdit="1"/>
+                </p:cNvSpPr>
+                <p:nvPr/>
+              </p:nvSpPr>
+              <p:spPr>
+                <a:xfrm>
+                  <a:off x="2337045" y="3061570"/>
+                  <a:ext cx="377026" cy="369332"/>
+                </a:xfrm>
+                <a:prstGeom prst="rect">
+                  <a:avLst/>
+                </a:prstGeom>
+                <a:blipFill>
+                  <a:blip r:embed="rId4"/>
+                  <a:stretch>
+                    <a:fillRect r="-6383" b="-21277"/>
+                  </a:stretch>
+                </a:blipFill>
+              </p:spPr>
+              <p:txBody>
+                <a:bodyPr/>
+                <a:lstStyle/>
+                <a:p>
+                  <a:r>
+                    <a:rPr lang="ja-JP" altLang="en-US">
+                      <a:noFill/>
+                    </a:rPr>
+                    <a:t> </a:t>
+                  </a:r>
+                </a:p>
+              </p:txBody>
+            </p:sp>
+          </mc:Fallback>
+        </mc:AlternateContent>
+        <mc:AlternateContent xmlns:mc="http://schemas.openxmlformats.org/markup-compatibility/2006" xmlns:a14="http://schemas.microsoft.com/office/drawing/2010/main">
+          <mc:Choice Requires="a14">
+            <p:sp>
+              <p:nvSpPr>
+                <p:cNvPr id="42" name="テキスト ボックス 41">
+                  <a:extLst>
+                    <a:ext uri="{FF2B5EF4-FFF2-40B4-BE49-F238E27FC236}">
+                      <a16:creationId xmlns:a16="http://schemas.microsoft.com/office/drawing/2014/main" id="{9D3A271E-D94D-4992-BD14-A27626FF3BD4}"/>
+                    </a:ext>
+                  </a:extLst>
+                </p:cNvPr>
+                <p:cNvSpPr txBox="1"/>
+                <p:nvPr/>
+              </p:nvSpPr>
+              <p:spPr>
+                <a:xfrm>
+                  <a:off x="2615547" y="3389152"/>
+                  <a:ext cx="359201" cy="338554"/>
+                </a:xfrm>
+                <a:prstGeom prst="rect">
+                  <a:avLst/>
+                </a:prstGeom>
+                <a:noFill/>
+              </p:spPr>
+              <p:txBody>
+                <a:bodyPr wrap="none" rtlCol="0">
+                  <a:spAutoFit/>
+                </a:bodyPr>
+                <a:lstStyle/>
+                <a:p>
+                  <a:pPr/>
+                  <a14:m>
+                    <m:oMathPara xmlns:m="http://schemas.openxmlformats.org/officeDocument/2006/math">
+                      <m:oMathParaPr>
+                        <m:jc m:val="centerGroup"/>
+                      </m:oMathParaPr>
+                      <m:oMath xmlns:m="http://schemas.openxmlformats.org/officeDocument/2006/math">
+                        <m:r>
+                          <a:rPr lang="en-US" altLang="ja-JP" sz="1600" b="0" i="1" smtClean="0">
+                            <a:solidFill>
+                              <a:schemeClr val="tx1"/>
+                            </a:solidFill>
+                            <a:latin typeface="Cambria Math" panose="02040503050406030204" pitchFamily="18" charset="0"/>
+                          </a:rPr>
+                          <m:t>𝑥</m:t>
+                        </m:r>
+                      </m:oMath>
+                    </m:oMathPara>
+                  </a14:m>
+                  <a:endParaRPr lang="en-US" altLang="ja-JP" sz="1600" dirty="0"/>
+                </a:p>
+              </p:txBody>
+            </p:sp>
+          </mc:Choice>
+          <mc:Fallback xmlns="">
+            <p:sp>
+              <p:nvSpPr>
+                <p:cNvPr id="42" name="テキスト ボックス 41">
+                  <a:extLst>
+                    <a:ext uri="{FF2B5EF4-FFF2-40B4-BE49-F238E27FC236}">
+                      <a16:creationId xmlns:a16="http://schemas.microsoft.com/office/drawing/2014/main" id="{9D3A271E-D94D-4992-BD14-A27626FF3BD4}"/>
+                    </a:ext>
+                  </a:extLst>
+                </p:cNvPr>
+                <p:cNvSpPr txBox="1">
+                  <a:spLocks noRot="1" noChangeAspect="1" noMove="1" noResize="1" noEditPoints="1" noAdjustHandles="1" noChangeArrowheads="1" noChangeShapeType="1" noTextEdit="1"/>
+                </p:cNvSpPr>
+                <p:nvPr/>
+              </p:nvSpPr>
+              <p:spPr>
+                <a:xfrm>
+                  <a:off x="2615547" y="3389152"/>
+                  <a:ext cx="359201" cy="338554"/>
+                </a:xfrm>
+                <a:prstGeom prst="rect">
+                  <a:avLst/>
+                </a:prstGeom>
+                <a:blipFill>
+                  <a:blip r:embed="rId6"/>
+                  <a:stretch>
+                    <a:fillRect/>
+                  </a:stretch>
+                </a:blipFill>
+              </p:spPr>
+              <p:txBody>
+                <a:bodyPr/>
+                <a:lstStyle/>
+                <a:p>
+                  <a:r>
+                    <a:rPr lang="ja-JP" altLang="en-US">
+                      <a:noFill/>
+                    </a:rPr>
+                    <a:t> </a:t>
+                  </a:r>
+                </a:p>
+              </p:txBody>
+            </p:sp>
+          </mc:Fallback>
+        </mc:AlternateContent>
+        <mc:AlternateContent xmlns:mc="http://schemas.openxmlformats.org/markup-compatibility/2006" xmlns:a14="http://schemas.microsoft.com/office/drawing/2010/main">
+          <mc:Choice Requires="a14">
+            <p:sp>
+              <p:nvSpPr>
+                <p:cNvPr id="43" name="テキスト ボックス 42">
+                  <a:extLst>
+                    <a:ext uri="{FF2B5EF4-FFF2-40B4-BE49-F238E27FC236}">
+                      <a16:creationId xmlns:a16="http://schemas.microsoft.com/office/drawing/2014/main" id="{82155811-47C1-4A2C-93F3-BDE97ABAE526}"/>
+                    </a:ext>
+                  </a:extLst>
+                </p:cNvPr>
+                <p:cNvSpPr txBox="1"/>
+                <p:nvPr/>
+              </p:nvSpPr>
+              <p:spPr>
+                <a:xfrm>
+                  <a:off x="3280172" y="2778456"/>
+                  <a:ext cx="362920" cy="338554"/>
+                </a:xfrm>
+                <a:prstGeom prst="rect">
+                  <a:avLst/>
+                </a:prstGeom>
+                <a:noFill/>
+              </p:spPr>
+              <p:txBody>
+                <a:bodyPr wrap="none" rtlCol="0">
+                  <a:spAutoFit/>
+                </a:bodyPr>
+                <a:lstStyle/>
+                <a:p>
+                  <a:pPr/>
+                  <a14:m>
+                    <m:oMathPara xmlns:m="http://schemas.openxmlformats.org/officeDocument/2006/math">
+                      <m:oMathParaPr>
+                        <m:jc m:val="centerGroup"/>
+                      </m:oMathParaPr>
+                      <m:oMath xmlns:m="http://schemas.openxmlformats.org/officeDocument/2006/math">
+                        <m:r>
+                          <a:rPr lang="en-US" altLang="ja-JP" sz="1600" b="0" i="1" smtClean="0">
+                            <a:latin typeface="Cambria Math" panose="02040503050406030204" pitchFamily="18" charset="0"/>
+                          </a:rPr>
+                          <m:t>𝑦</m:t>
+                        </m:r>
+                      </m:oMath>
+                    </m:oMathPara>
+                  </a14:m>
+                  <a:endParaRPr lang="en-US" altLang="ja-JP" sz="1600" dirty="0"/>
+                </a:p>
+              </p:txBody>
+            </p:sp>
+          </mc:Choice>
+          <mc:Fallback xmlns="">
+            <p:sp>
+              <p:nvSpPr>
+                <p:cNvPr id="43" name="テキスト ボックス 42">
+                  <a:extLst>
+                    <a:ext uri="{FF2B5EF4-FFF2-40B4-BE49-F238E27FC236}">
+                      <a16:creationId xmlns:a16="http://schemas.microsoft.com/office/drawing/2014/main" id="{82155811-47C1-4A2C-93F3-BDE97ABAE526}"/>
+                    </a:ext>
+                  </a:extLst>
+                </p:cNvPr>
+                <p:cNvSpPr txBox="1">
+                  <a:spLocks noRot="1" noChangeAspect="1" noMove="1" noResize="1" noEditPoints="1" noAdjustHandles="1" noChangeArrowheads="1" noChangeShapeType="1" noTextEdit="1"/>
+                </p:cNvSpPr>
+                <p:nvPr/>
+              </p:nvSpPr>
+              <p:spPr>
+                <a:xfrm>
+                  <a:off x="3280172" y="2778456"/>
+                  <a:ext cx="362920" cy="338554"/>
+                </a:xfrm>
+                <a:prstGeom prst="rect">
+                  <a:avLst/>
+                </a:prstGeom>
+                <a:blipFill>
+                  <a:blip r:embed="rId7"/>
+                  <a:stretch>
+                    <a:fillRect b="-3636"/>
+                  </a:stretch>
+                </a:blipFill>
+              </p:spPr>
+              <p:txBody>
+                <a:bodyPr/>
+                <a:lstStyle/>
+                <a:p>
+                  <a:r>
+                    <a:rPr lang="ja-JP" altLang="en-US">
+                      <a:noFill/>
+                    </a:rPr>
+                    <a:t> </a:t>
+                  </a:r>
+                </a:p>
+              </p:txBody>
+            </p:sp>
+          </mc:Fallback>
+        </mc:AlternateContent>
+      </p:grpSp>
+      <p:grpSp>
+        <p:nvGrpSpPr>
+          <p:cNvPr id="52" name="グループ化 51">
+            <a:extLst>
+              <a:ext uri="{FF2B5EF4-FFF2-40B4-BE49-F238E27FC236}">
+                <a16:creationId xmlns:a16="http://schemas.microsoft.com/office/drawing/2014/main" id="{56D45CB3-0A5B-4214-887D-F7EA9C6FD9DC}"/>
+              </a:ext>
+            </a:extLst>
+          </p:cNvPr>
+          <p:cNvGrpSpPr/>
+          <p:nvPr/>
+        </p:nvGrpSpPr>
+        <p:grpSpPr>
+          <a:xfrm>
+            <a:off x="6216434" y="2980266"/>
+            <a:ext cx="5603254" cy="2500438"/>
+            <a:chOff x="567542" y="1817794"/>
+            <a:chExt cx="7329407" cy="3240000"/>
+          </a:xfrm>
+        </p:grpSpPr>
+        <p:grpSp>
+          <p:nvGrpSpPr>
+            <p:cNvPr id="53" name="グループ化 52">
+              <a:extLst>
+                <a:ext uri="{FF2B5EF4-FFF2-40B4-BE49-F238E27FC236}">
+                  <a16:creationId xmlns:a16="http://schemas.microsoft.com/office/drawing/2014/main" id="{25C59D8B-DF22-4F90-9166-705FA800802B}"/>
+                </a:ext>
+              </a:extLst>
+            </p:cNvPr>
+            <p:cNvGrpSpPr/>
+            <p:nvPr/>
+          </p:nvGrpSpPr>
+          <p:grpSpPr>
+            <a:xfrm>
+              <a:off x="567542" y="1817794"/>
+              <a:ext cx="3240000" cy="3240000"/>
+              <a:chOff x="567542" y="1817794"/>
+              <a:chExt cx="3240000" cy="3240000"/>
+            </a:xfrm>
+          </p:grpSpPr>
           <p:sp>
             <p:nvSpPr>
-              <p:cNvPr id="6" name="テキスト ボックス 5">
+              <p:cNvPr id="64" name="楕円 63">
                 <a:extLst>
                   <a:ext uri="{FF2B5EF4-FFF2-40B4-BE49-F238E27FC236}">
-                    <a16:creationId xmlns:a16="http://schemas.microsoft.com/office/drawing/2014/main" id="{55830AD6-028B-4C4E-80BF-B70DFC1C3A46}"/>
+                    <a16:creationId xmlns:a16="http://schemas.microsoft.com/office/drawing/2014/main" id="{B91852E8-1292-4BB1-98B4-937E255A6FE0}"/>
                   </a:ext>
                 </a:extLst>
               </p:cNvPr>
-              <p:cNvSpPr txBox="1">
-                <a:spLocks noRot="1" noChangeAspect="1" noMove="1" noResize="1" noEditPoints="1" noAdjustHandles="1" noChangeArrowheads="1" noChangeShapeType="1" noTextEdit="1"/>
-              </p:cNvSpPr>
+              <p:cNvSpPr/>
               <p:nvPr/>
             </p:nvSpPr>
             <p:spPr>
               <a:xfrm>
-                <a:off x="567542" y="1216429"/>
-                <a:ext cx="7725320" cy="3062633"/>
+                <a:off x="567542" y="1817794"/>
+                <a:ext cx="3240000" cy="3240000"/>
               </a:xfrm>
-              <a:prstGeom prst="rect">
+              <a:prstGeom prst="ellipse">
                 <a:avLst/>
               </a:prstGeom>
-              <a:blipFill>
-                <a:blip r:embed="rId2"/>
-                <a:stretch>
-                  <a:fillRect l="-1184" t="-1594" b="-3586"/>
-                </a:stretch>
-              </a:blipFill>
+              <a:noFill/>
             </p:spPr>
+            <p:style>
+              <a:lnRef idx="2">
+                <a:schemeClr val="accent1">
+                  <a:shade val="50000"/>
+                </a:schemeClr>
+              </a:lnRef>
+              <a:fillRef idx="1">
+                <a:schemeClr val="accent1"/>
+              </a:fillRef>
+              <a:effectRef idx="0">
+                <a:schemeClr val="accent1"/>
+              </a:effectRef>
+              <a:fontRef idx="minor">
+                <a:schemeClr val="lt1"/>
+              </a:fontRef>
+            </p:style>
             <p:txBody>
-              <a:bodyPr/>
+              <a:bodyPr rtlCol="0" anchor="ctr"/>
               <a:lstStyle/>
               <a:p>
-                <a:r>
-                  <a:rPr lang="ja-JP" altLang="en-US">
-                    <a:noFill/>
-                  </a:rPr>
-                  <a:t> </a:t>
-                </a:r>
+                <a:pPr algn="ctr"/>
+                <a:endParaRPr kumimoji="1" lang="ja-JP" altLang="en-US"/>
               </a:p>
             </p:txBody>
           </p:sp>
-        </mc:Fallback>
-      </mc:AlternateContent>
+          <p:cxnSp>
+            <p:nvCxnSpPr>
+              <p:cNvPr id="65" name="直線コネクタ 64">
+                <a:extLst>
+                  <a:ext uri="{FF2B5EF4-FFF2-40B4-BE49-F238E27FC236}">
+                    <a16:creationId xmlns:a16="http://schemas.microsoft.com/office/drawing/2014/main" id="{EC15D4BC-2123-41FF-A210-728C36568BB3}"/>
+                  </a:ext>
+                </a:extLst>
+              </p:cNvPr>
+              <p:cNvCxnSpPr>
+                <a:cxnSpLocks/>
+                <a:stCxn id="64" idx="7"/>
+              </p:cNvCxnSpPr>
+              <p:nvPr/>
+            </p:nvCxnSpPr>
+            <p:spPr>
+              <a:xfrm flipH="1">
+                <a:off x="2187543" y="2292281"/>
+                <a:ext cx="1145512" cy="1145512"/>
+              </a:xfrm>
+              <a:prstGeom prst="line">
+                <a:avLst/>
+              </a:prstGeom>
+            </p:spPr>
+            <p:style>
+              <a:lnRef idx="1">
+                <a:schemeClr val="accent1"/>
+              </a:lnRef>
+              <a:fillRef idx="0">
+                <a:schemeClr val="accent1"/>
+              </a:fillRef>
+              <a:effectRef idx="0">
+                <a:schemeClr val="accent1"/>
+              </a:effectRef>
+              <a:fontRef idx="minor">
+                <a:schemeClr val="tx1"/>
+              </a:fontRef>
+            </p:style>
+          </p:cxnSp>
+          <p:sp>
+            <p:nvSpPr>
+              <p:cNvPr id="66" name="楕円 65">
+                <a:extLst>
+                  <a:ext uri="{FF2B5EF4-FFF2-40B4-BE49-F238E27FC236}">
+                    <a16:creationId xmlns:a16="http://schemas.microsoft.com/office/drawing/2014/main" id="{91272550-D95D-4D1B-A4AF-D2878AC5E6AC}"/>
+                  </a:ext>
+                </a:extLst>
+              </p:cNvPr>
+              <p:cNvSpPr/>
+              <p:nvPr/>
+            </p:nvSpPr>
+            <p:spPr>
+              <a:xfrm>
+                <a:off x="2172745" y="3389152"/>
+                <a:ext cx="72000" cy="72000"/>
+              </a:xfrm>
+              <a:prstGeom prst="ellipse">
+                <a:avLst/>
+              </a:prstGeom>
+            </p:spPr>
+            <p:style>
+              <a:lnRef idx="2">
+                <a:schemeClr val="accent1">
+                  <a:shade val="50000"/>
+                </a:schemeClr>
+              </a:lnRef>
+              <a:fillRef idx="1">
+                <a:schemeClr val="accent1"/>
+              </a:fillRef>
+              <a:effectRef idx="0">
+                <a:schemeClr val="accent1"/>
+              </a:effectRef>
+              <a:fontRef idx="minor">
+                <a:schemeClr val="lt1"/>
+              </a:fontRef>
+            </p:style>
+            <p:txBody>
+              <a:bodyPr rtlCol="0" anchor="ctr"/>
+              <a:lstStyle/>
+              <a:p>
+                <a:pPr algn="ctr"/>
+                <a:endParaRPr kumimoji="1" lang="ja-JP" altLang="en-US" dirty="0"/>
+              </a:p>
+            </p:txBody>
+          </p:sp>
+          <mc:AlternateContent xmlns:mc="http://schemas.openxmlformats.org/markup-compatibility/2006">
+            <mc:Choice xmlns:a14="http://schemas.microsoft.com/office/drawing/2010/main" Requires="a14">
+              <p:sp>
+                <p:nvSpPr>
+                  <p:cNvPr id="67" name="テキスト ボックス 66">
+                    <a:extLst>
+                      <a:ext uri="{FF2B5EF4-FFF2-40B4-BE49-F238E27FC236}">
+                        <a16:creationId xmlns:a16="http://schemas.microsoft.com/office/drawing/2014/main" id="{5C72B971-7EC6-4E4D-AFB7-8B51E7AE103B}"/>
+                      </a:ext>
+                    </a:extLst>
+                  </p:cNvPr>
+                  <p:cNvSpPr txBox="1"/>
+                  <p:nvPr/>
+                </p:nvSpPr>
+                <p:spPr>
+                  <a:xfrm>
+                    <a:off x="2108094" y="2462791"/>
+                    <a:ext cx="830764" cy="478570"/>
+                  </a:xfrm>
+                  <a:prstGeom prst="rect">
+                    <a:avLst/>
+                  </a:prstGeom>
+                  <a:noFill/>
+                </p:spPr>
+                <p:txBody>
+                  <a:bodyPr wrap="none" rtlCol="0">
+                    <a:spAutoFit/>
+                  </a:bodyPr>
+                  <a:lstStyle/>
+                  <a:p>
+                    <a:pPr/>
+                    <a14:m>
+                      <m:oMathPara xmlns:m="http://schemas.openxmlformats.org/officeDocument/2006/math">
+                        <m:oMathParaPr>
+                          <m:jc m:val="centerGroup"/>
+                        </m:oMathParaPr>
+                        <m:oMath xmlns:m="http://schemas.openxmlformats.org/officeDocument/2006/math">
+                          <m:r>
+                            <a:rPr lang="en-US" altLang="ja-JP" b="0" i="1" smtClean="0">
+                              <a:latin typeface="Cambria Math" panose="02040503050406030204" pitchFamily="18" charset="0"/>
+                            </a:rPr>
+                            <m:t>100</m:t>
+                          </m:r>
+                        </m:oMath>
+                      </m:oMathPara>
+                    </a14:m>
+                    <a:endParaRPr lang="en-US" altLang="ja-JP" sz="2400" b="0" dirty="0"/>
+                  </a:p>
+                </p:txBody>
+              </p:sp>
+            </mc:Choice>
+            <mc:Fallback>
+              <p:sp>
+                <p:nvSpPr>
+                  <p:cNvPr id="67" name="テキスト ボックス 66">
+                    <a:extLst>
+                      <a:ext uri="{FF2B5EF4-FFF2-40B4-BE49-F238E27FC236}">
+                        <a16:creationId xmlns:a16="http://schemas.microsoft.com/office/drawing/2014/main" id="{5C72B971-7EC6-4E4D-AFB7-8B51E7AE103B}"/>
+                      </a:ext>
+                    </a:extLst>
+                  </p:cNvPr>
+                  <p:cNvSpPr txBox="1">
+                    <a:spLocks noRot="1" noChangeAspect="1" noMove="1" noResize="1" noEditPoints="1" noAdjustHandles="1" noChangeArrowheads="1" noChangeShapeType="1" noTextEdit="1"/>
+                  </p:cNvSpPr>
+                  <p:nvPr/>
+                </p:nvSpPr>
+                <p:spPr>
+                  <a:xfrm>
+                    <a:off x="2108094" y="2462791"/>
+                    <a:ext cx="830764" cy="478570"/>
+                  </a:xfrm>
+                  <a:prstGeom prst="rect">
+                    <a:avLst/>
+                  </a:prstGeom>
+                  <a:blipFill>
+                    <a:blip r:embed="rId8"/>
+                    <a:stretch>
+                      <a:fillRect/>
+                    </a:stretch>
+                  </a:blipFill>
+                </p:spPr>
+                <p:txBody>
+                  <a:bodyPr/>
+                  <a:lstStyle/>
+                  <a:p>
+                    <a:r>
+                      <a:rPr lang="ja-JP" altLang="en-US">
+                        <a:noFill/>
+                      </a:rPr>
+                      <a:t> </a:t>
+                    </a:r>
+                  </a:p>
+                </p:txBody>
+              </p:sp>
+            </mc:Fallback>
+          </mc:AlternateContent>
+        </p:grpSp>
+        <mc:AlternateContent xmlns:mc="http://schemas.openxmlformats.org/markup-compatibility/2006">
+          <mc:Choice xmlns:a14="http://schemas.microsoft.com/office/drawing/2010/main" Requires="a14">
+            <p:sp>
+              <p:nvSpPr>
+                <p:cNvPr id="54" name="テキスト ボックス 53">
+                  <a:extLst>
+                    <a:ext uri="{FF2B5EF4-FFF2-40B4-BE49-F238E27FC236}">
+                      <a16:creationId xmlns:a16="http://schemas.microsoft.com/office/drawing/2014/main" id="{278CA5DA-5FC3-44CF-AEBC-9E73DEBAF764}"/>
+                    </a:ext>
+                  </a:extLst>
+                </p:cNvPr>
+                <p:cNvSpPr txBox="1"/>
+                <p:nvPr/>
+              </p:nvSpPr>
+              <p:spPr>
+                <a:xfrm>
+                  <a:off x="3219681" y="1867166"/>
+                  <a:ext cx="4677268" cy="518452"/>
+                </a:xfrm>
+                <a:prstGeom prst="rect">
+                  <a:avLst/>
+                </a:prstGeom>
+                <a:noFill/>
+              </p:spPr>
+              <p:txBody>
+                <a:bodyPr wrap="none" rtlCol="0">
+                  <a:spAutoFit/>
+                </a:bodyPr>
+                <a:lstStyle/>
+                <a:p>
+                  <a:pPr/>
+                  <a14:m>
+                    <m:oMathPara xmlns:m="http://schemas.openxmlformats.org/officeDocument/2006/math">
+                      <m:oMathParaPr>
+                        <m:jc m:val="centerGroup"/>
+                      </m:oMathParaPr>
+                      <m:oMath xmlns:m="http://schemas.openxmlformats.org/officeDocument/2006/math">
+                        <m:r>
+                          <a:rPr lang="en-US" altLang="ja-JP" sz="2000" b="1" i="1" smtClean="0">
+                            <a:solidFill>
+                              <a:srgbClr val="FF0000"/>
+                            </a:solidFill>
+                            <a:latin typeface="Cambria Math" panose="02040503050406030204" pitchFamily="18" charset="0"/>
+                          </a:rPr>
+                          <m:t>(</m:t>
+                        </m:r>
+                        <m:r>
+                          <a:rPr lang="en-US" altLang="ja-JP" sz="2000" b="1" i="1" smtClean="0">
+                            <a:solidFill>
+                              <a:srgbClr val="FF0000"/>
+                            </a:solidFill>
+                            <a:latin typeface="Cambria Math" panose="02040503050406030204" pitchFamily="18" charset="0"/>
+                          </a:rPr>
+                          <m:t>𝒙</m:t>
+                        </m:r>
+                        <m:r>
+                          <a:rPr lang="en-US" altLang="ja-JP" sz="2000" b="1" i="1" smtClean="0">
+                            <a:solidFill>
+                              <a:srgbClr val="FF0000"/>
+                            </a:solidFill>
+                            <a:latin typeface="Cambria Math" panose="02040503050406030204" pitchFamily="18" charset="0"/>
+                          </a:rPr>
+                          <m:t>=</m:t>
+                        </m:r>
+                        <m:r>
+                          <a:rPr lang="en-US" altLang="ja-JP" sz="2000" b="1" i="1" smtClean="0">
+                            <a:solidFill>
+                              <a:srgbClr val="FF0000"/>
+                            </a:solidFill>
+                            <a:latin typeface="Cambria Math" panose="02040503050406030204" pitchFamily="18" charset="0"/>
+                          </a:rPr>
+                          <m:t>𝟏𝟎𝟎</m:t>
+                        </m:r>
+                        <m:r>
+                          <a:rPr lang="en-US" altLang="ja-JP" sz="2000" b="1" i="1" smtClean="0">
+                            <a:solidFill>
+                              <a:srgbClr val="FF0000"/>
+                            </a:solidFill>
+                            <a:latin typeface="Cambria Math" panose="02040503050406030204" pitchFamily="18" charset="0"/>
+                          </a:rPr>
+                          <m:t>𝒄𝒐𝒔</m:t>
+                        </m:r>
+                        <m:r>
+                          <a:rPr lang="en-US" altLang="ja-JP" sz="2000" b="1" i="1">
+                            <a:solidFill>
+                              <a:srgbClr val="FF0000"/>
+                            </a:solidFill>
+                            <a:latin typeface="Cambria Math" panose="02040503050406030204" pitchFamily="18" charset="0"/>
+                          </a:rPr>
+                          <m:t>𝜽</m:t>
+                        </m:r>
+                        <m:r>
+                          <a:rPr lang="en-US" altLang="ja-JP" sz="2000" b="1" i="1" smtClean="0">
+                            <a:solidFill>
+                              <a:srgbClr val="FF0000"/>
+                            </a:solidFill>
+                            <a:latin typeface="Cambria Math" panose="02040503050406030204" pitchFamily="18" charset="0"/>
+                          </a:rPr>
+                          <m:t>, </m:t>
+                        </m:r>
+                        <m:r>
+                          <a:rPr lang="en-US" altLang="ja-JP" sz="2000" b="1" i="1" smtClean="0">
+                            <a:solidFill>
+                              <a:srgbClr val="FF0000"/>
+                            </a:solidFill>
+                            <a:latin typeface="Cambria Math" panose="02040503050406030204" pitchFamily="18" charset="0"/>
+                          </a:rPr>
+                          <m:t>𝒚</m:t>
+                        </m:r>
+                        <m:r>
+                          <a:rPr lang="en-US" altLang="ja-JP" sz="2000" b="1" i="1" smtClean="0">
+                            <a:solidFill>
+                              <a:srgbClr val="FF0000"/>
+                            </a:solidFill>
+                            <a:latin typeface="Cambria Math" panose="02040503050406030204" pitchFamily="18" charset="0"/>
+                          </a:rPr>
+                          <m:t>=</m:t>
+                        </m:r>
+                        <m:r>
+                          <a:rPr lang="en-US" altLang="ja-JP" sz="2000" b="1" i="1" smtClean="0">
+                            <a:solidFill>
+                              <a:srgbClr val="FF0000"/>
+                            </a:solidFill>
+                            <a:latin typeface="Cambria Math" panose="02040503050406030204" pitchFamily="18" charset="0"/>
+                          </a:rPr>
+                          <m:t>𝟏𝟎𝟎</m:t>
+                        </m:r>
+                        <m:r>
+                          <a:rPr lang="en-US" altLang="ja-JP" sz="2000" b="1" i="1" smtClean="0">
+                            <a:solidFill>
+                              <a:srgbClr val="FF0000"/>
+                            </a:solidFill>
+                            <a:latin typeface="Cambria Math" panose="02040503050406030204" pitchFamily="18" charset="0"/>
+                          </a:rPr>
+                          <m:t>𝒔𝒊𝒏</m:t>
+                        </m:r>
+                        <m:r>
+                          <a:rPr lang="en-US" altLang="ja-JP" sz="2000" b="1" i="1">
+                            <a:solidFill>
+                              <a:srgbClr val="FF0000"/>
+                            </a:solidFill>
+                            <a:latin typeface="Cambria Math" panose="02040503050406030204" pitchFamily="18" charset="0"/>
+                          </a:rPr>
+                          <m:t>𝜽</m:t>
+                        </m:r>
+                        <m:r>
+                          <a:rPr lang="en-US" altLang="ja-JP" sz="2000" b="1" i="1" smtClean="0">
+                            <a:solidFill>
+                              <a:srgbClr val="FF0000"/>
+                            </a:solidFill>
+                            <a:latin typeface="Cambria Math" panose="02040503050406030204" pitchFamily="18" charset="0"/>
+                          </a:rPr>
+                          <m:t>)</m:t>
+                        </m:r>
+                      </m:oMath>
+                    </m:oMathPara>
+                  </a14:m>
+                  <a:endParaRPr lang="en-US" altLang="ja-JP" sz="3200" b="1" dirty="0">
+                    <a:solidFill>
+                      <a:srgbClr val="FF0000"/>
+                    </a:solidFill>
+                  </a:endParaRPr>
+                </a:p>
+              </p:txBody>
+            </p:sp>
+          </mc:Choice>
+          <mc:Fallback>
+            <p:sp>
+              <p:nvSpPr>
+                <p:cNvPr id="54" name="テキスト ボックス 53">
+                  <a:extLst>
+                    <a:ext uri="{FF2B5EF4-FFF2-40B4-BE49-F238E27FC236}">
+                      <a16:creationId xmlns:a16="http://schemas.microsoft.com/office/drawing/2014/main" id="{278CA5DA-5FC3-44CF-AEBC-9E73DEBAF764}"/>
+                    </a:ext>
+                  </a:extLst>
+                </p:cNvPr>
+                <p:cNvSpPr txBox="1">
+                  <a:spLocks noRot="1" noChangeAspect="1" noMove="1" noResize="1" noEditPoints="1" noAdjustHandles="1" noChangeArrowheads="1" noChangeShapeType="1" noTextEdit="1"/>
+                </p:cNvSpPr>
+                <p:nvPr/>
+              </p:nvSpPr>
+              <p:spPr>
+                <a:xfrm>
+                  <a:off x="3219681" y="1867166"/>
+                  <a:ext cx="4677268" cy="518452"/>
+                </a:xfrm>
+                <a:prstGeom prst="rect">
+                  <a:avLst/>
+                </a:prstGeom>
+                <a:blipFill>
+                  <a:blip r:embed="rId9"/>
+                  <a:stretch>
+                    <a:fillRect b="-15152"/>
+                  </a:stretch>
+                </a:blipFill>
+              </p:spPr>
+              <p:txBody>
+                <a:bodyPr/>
+                <a:lstStyle/>
+                <a:p>
+                  <a:r>
+                    <a:rPr lang="ja-JP" altLang="en-US">
+                      <a:noFill/>
+                    </a:rPr>
+                    <a:t> </a:t>
+                  </a:r>
+                </a:p>
+              </p:txBody>
+            </p:sp>
+          </mc:Fallback>
+        </mc:AlternateContent>
+        <p:sp>
+          <p:nvSpPr>
+            <p:cNvPr id="55" name="楕円 54">
+              <a:extLst>
+                <a:ext uri="{FF2B5EF4-FFF2-40B4-BE49-F238E27FC236}">
+                  <a16:creationId xmlns:a16="http://schemas.microsoft.com/office/drawing/2014/main" id="{F43393E3-7BE3-4B86-8E83-D80A7C0E32F2}"/>
+                </a:ext>
+              </a:extLst>
+            </p:cNvPr>
+            <p:cNvSpPr/>
+            <p:nvPr/>
+          </p:nvSpPr>
+          <p:spPr>
+            <a:xfrm>
+              <a:off x="3288482" y="2256638"/>
+              <a:ext cx="72000" cy="72000"/>
+            </a:xfrm>
+            <a:prstGeom prst="ellipse">
+              <a:avLst/>
+            </a:prstGeom>
+          </p:spPr>
+          <p:style>
+            <a:lnRef idx="2">
+              <a:schemeClr val="accent1">
+                <a:shade val="50000"/>
+              </a:schemeClr>
+            </a:lnRef>
+            <a:fillRef idx="1">
+              <a:schemeClr val="accent1"/>
+            </a:fillRef>
+            <a:effectRef idx="0">
+              <a:schemeClr val="accent1"/>
+            </a:effectRef>
+            <a:fontRef idx="minor">
+              <a:schemeClr val="lt1"/>
+            </a:fontRef>
+          </p:style>
+          <p:txBody>
+            <a:bodyPr rtlCol="0" anchor="ctr"/>
+            <a:lstStyle/>
+            <a:p>
+              <a:pPr algn="ctr"/>
+              <a:endParaRPr kumimoji="1" lang="ja-JP" altLang="en-US"/>
+            </a:p>
+          </p:txBody>
+        </p:sp>
+        <p:cxnSp>
+          <p:nvCxnSpPr>
+            <p:cNvPr id="56" name="直線コネクタ 55">
+              <a:extLst>
+                <a:ext uri="{FF2B5EF4-FFF2-40B4-BE49-F238E27FC236}">
+                  <a16:creationId xmlns:a16="http://schemas.microsoft.com/office/drawing/2014/main" id="{E0C446C6-754C-4D34-BDBB-24691E608CF4}"/>
+                </a:ext>
+              </a:extLst>
+            </p:cNvPr>
+            <p:cNvCxnSpPr>
+              <a:cxnSpLocks/>
+              <a:stCxn id="64" idx="6"/>
+            </p:cNvCxnSpPr>
+            <p:nvPr/>
+          </p:nvCxnSpPr>
+          <p:spPr>
+            <a:xfrm flipH="1" flipV="1">
+              <a:off x="2244746" y="3429000"/>
+              <a:ext cx="1562796" cy="8794"/>
+            </a:xfrm>
+            <a:prstGeom prst="line">
+              <a:avLst/>
+            </a:prstGeom>
+            <a:ln>
+              <a:solidFill>
+                <a:srgbClr val="FF0000"/>
+              </a:solidFill>
+            </a:ln>
+          </p:spPr>
+          <p:style>
+            <a:lnRef idx="1">
+              <a:schemeClr val="accent1"/>
+            </a:lnRef>
+            <a:fillRef idx="0">
+              <a:schemeClr val="accent1"/>
+            </a:fillRef>
+            <a:effectRef idx="0">
+              <a:schemeClr val="accent1"/>
+            </a:effectRef>
+            <a:fontRef idx="minor">
+              <a:schemeClr val="tx1"/>
+            </a:fontRef>
+          </p:style>
+        </p:cxnSp>
+        <p:cxnSp>
+          <p:nvCxnSpPr>
+            <p:cNvPr id="57" name="直線コネクタ 56">
+              <a:extLst>
+                <a:ext uri="{FF2B5EF4-FFF2-40B4-BE49-F238E27FC236}">
+                  <a16:creationId xmlns:a16="http://schemas.microsoft.com/office/drawing/2014/main" id="{96DA3431-9F46-4E59-B98D-CCC4BA9E308A}"/>
+                </a:ext>
+              </a:extLst>
+            </p:cNvPr>
+            <p:cNvCxnSpPr>
+              <a:cxnSpLocks/>
+              <a:stCxn id="55" idx="4"/>
+            </p:cNvCxnSpPr>
+            <p:nvPr/>
+          </p:nvCxnSpPr>
+          <p:spPr>
+            <a:xfrm>
+              <a:off x="3324482" y="2328638"/>
+              <a:ext cx="8573" cy="1104759"/>
+            </a:xfrm>
+            <a:prstGeom prst="line">
+              <a:avLst/>
+            </a:prstGeom>
+            <a:ln>
+              <a:solidFill>
+                <a:srgbClr val="00B050"/>
+              </a:solidFill>
+            </a:ln>
+          </p:spPr>
+          <p:style>
+            <a:lnRef idx="1">
+              <a:schemeClr val="accent1"/>
+            </a:lnRef>
+            <a:fillRef idx="0">
+              <a:schemeClr val="accent1"/>
+            </a:fillRef>
+            <a:effectRef idx="0">
+              <a:schemeClr val="accent1"/>
+            </a:effectRef>
+            <a:fontRef idx="minor">
+              <a:schemeClr val="tx1"/>
+            </a:fontRef>
+          </p:style>
+        </p:cxnSp>
+        <p:cxnSp>
+          <p:nvCxnSpPr>
+            <p:cNvPr id="58" name="直線コネクタ 57">
+              <a:extLst>
+                <a:ext uri="{FF2B5EF4-FFF2-40B4-BE49-F238E27FC236}">
+                  <a16:creationId xmlns:a16="http://schemas.microsoft.com/office/drawing/2014/main" id="{C97F2D9A-F94F-47F2-BED8-88B746999ADE}"/>
+                </a:ext>
+              </a:extLst>
+            </p:cNvPr>
+            <p:cNvCxnSpPr>
+              <a:cxnSpLocks/>
+            </p:cNvCxnSpPr>
+            <p:nvPr/>
+          </p:nvCxnSpPr>
+          <p:spPr>
+            <a:xfrm>
+              <a:off x="3211472" y="3345656"/>
+              <a:ext cx="0" cy="87741"/>
+            </a:xfrm>
+            <a:prstGeom prst="line">
+              <a:avLst/>
+            </a:prstGeom>
+            <a:ln>
+              <a:solidFill>
+                <a:schemeClr val="tx1"/>
+              </a:solidFill>
+            </a:ln>
+          </p:spPr>
+          <p:style>
+            <a:lnRef idx="1">
+              <a:schemeClr val="accent1"/>
+            </a:lnRef>
+            <a:fillRef idx="0">
+              <a:schemeClr val="accent1"/>
+            </a:fillRef>
+            <a:effectRef idx="0">
+              <a:schemeClr val="accent1"/>
+            </a:effectRef>
+            <a:fontRef idx="minor">
+              <a:schemeClr val="tx1"/>
+            </a:fontRef>
+          </p:style>
+        </p:cxnSp>
+        <p:cxnSp>
+          <p:nvCxnSpPr>
+            <p:cNvPr id="59" name="直線コネクタ 58">
+              <a:extLst>
+                <a:ext uri="{FF2B5EF4-FFF2-40B4-BE49-F238E27FC236}">
+                  <a16:creationId xmlns:a16="http://schemas.microsoft.com/office/drawing/2014/main" id="{C066F62E-85BB-46EA-93C7-EBDBFF004DDE}"/>
+                </a:ext>
+              </a:extLst>
+            </p:cNvPr>
+            <p:cNvCxnSpPr>
+              <a:cxnSpLocks/>
+            </p:cNvCxnSpPr>
+            <p:nvPr/>
+          </p:nvCxnSpPr>
+          <p:spPr>
+            <a:xfrm>
+              <a:off x="3211472" y="3345656"/>
+              <a:ext cx="121583" cy="0"/>
+            </a:xfrm>
+            <a:prstGeom prst="line">
+              <a:avLst/>
+            </a:prstGeom>
+            <a:ln>
+              <a:solidFill>
+                <a:schemeClr val="tx1"/>
+              </a:solidFill>
+            </a:ln>
+          </p:spPr>
+          <p:style>
+            <a:lnRef idx="1">
+              <a:schemeClr val="accent1"/>
+            </a:lnRef>
+            <a:fillRef idx="0">
+              <a:schemeClr val="accent1"/>
+            </a:fillRef>
+            <a:effectRef idx="0">
+              <a:schemeClr val="accent1"/>
+            </a:effectRef>
+            <a:fontRef idx="minor">
+              <a:schemeClr val="tx1"/>
+            </a:fontRef>
+          </p:style>
+        </p:cxnSp>
+        <p:sp>
+          <p:nvSpPr>
+            <p:cNvPr id="60" name="円弧 59">
+              <a:extLst>
+                <a:ext uri="{FF2B5EF4-FFF2-40B4-BE49-F238E27FC236}">
+                  <a16:creationId xmlns:a16="http://schemas.microsoft.com/office/drawing/2014/main" id="{5030C157-8243-42EA-ACE3-9359DE0B7FFF}"/>
+                </a:ext>
+              </a:extLst>
+            </p:cNvPr>
+            <p:cNvSpPr/>
+            <p:nvPr/>
+          </p:nvSpPr>
+          <p:spPr>
+            <a:xfrm>
+              <a:off x="2221842" y="3283015"/>
+              <a:ext cx="211940" cy="272651"/>
+            </a:xfrm>
+            <a:prstGeom prst="arc">
+              <a:avLst>
+                <a:gd name="adj1" fmla="val 16602575"/>
+                <a:gd name="adj2" fmla="val 231423"/>
+              </a:avLst>
+            </a:prstGeom>
+            <a:ln>
+              <a:solidFill>
+                <a:schemeClr val="tx1"/>
+              </a:solidFill>
+            </a:ln>
+          </p:spPr>
+          <p:style>
+            <a:lnRef idx="1">
+              <a:schemeClr val="accent1"/>
+            </a:lnRef>
+            <a:fillRef idx="0">
+              <a:schemeClr val="accent1"/>
+            </a:fillRef>
+            <a:effectRef idx="0">
+              <a:schemeClr val="accent1"/>
+            </a:effectRef>
+            <a:fontRef idx="minor">
+              <a:schemeClr val="tx1"/>
+            </a:fontRef>
+          </p:style>
+          <p:txBody>
+            <a:bodyPr rtlCol="0" anchor="ctr"/>
+            <a:lstStyle/>
+            <a:p>
+              <a:pPr algn="ctr"/>
+              <a:endParaRPr kumimoji="1" lang="ja-JP" altLang="en-US"/>
+            </a:p>
+          </p:txBody>
+        </p:sp>
+        <mc:AlternateContent xmlns:mc="http://schemas.openxmlformats.org/markup-compatibility/2006">
+          <mc:Choice xmlns:a14="http://schemas.microsoft.com/office/drawing/2010/main" Requires="a14">
+            <p:sp>
+              <p:nvSpPr>
+                <p:cNvPr id="61" name="テキスト ボックス 60">
+                  <a:extLst>
+                    <a:ext uri="{FF2B5EF4-FFF2-40B4-BE49-F238E27FC236}">
+                      <a16:creationId xmlns:a16="http://schemas.microsoft.com/office/drawing/2014/main" id="{C929BC9E-B001-4418-AFE1-6083F3D224D9}"/>
+                    </a:ext>
+                  </a:extLst>
+                </p:cNvPr>
+                <p:cNvSpPr txBox="1"/>
+                <p:nvPr/>
+              </p:nvSpPr>
+              <p:spPr>
+                <a:xfrm>
+                  <a:off x="2337045" y="3061570"/>
+                  <a:ext cx="377026" cy="369332"/>
+                </a:xfrm>
+                <a:prstGeom prst="rect">
+                  <a:avLst/>
+                </a:prstGeom>
+                <a:noFill/>
+              </p:spPr>
+              <p:txBody>
+                <a:bodyPr wrap="none" rtlCol="0">
+                  <a:spAutoFit/>
+                </a:bodyPr>
+                <a:lstStyle/>
+                <a:p>
+                  <a:pPr/>
+                  <a14:m>
+                    <m:oMathPara xmlns:m="http://schemas.openxmlformats.org/officeDocument/2006/math">
+                      <m:oMathParaPr>
+                        <m:jc m:val="centerGroup"/>
+                      </m:oMathParaPr>
+                      <m:oMath xmlns:m="http://schemas.openxmlformats.org/officeDocument/2006/math">
+                        <m:r>
+                          <m:rPr>
+                            <m:sty m:val="p"/>
+                          </m:rPr>
+                          <a:rPr lang="en-US" altLang="ja-JP" i="1">
+                            <a:latin typeface="Cambria Math" panose="02040503050406030204" pitchFamily="18" charset="0"/>
+                          </a:rPr>
+                          <m:t>θ</m:t>
+                        </m:r>
+                      </m:oMath>
+                    </m:oMathPara>
+                  </a14:m>
+                  <a:endParaRPr lang="en-US" altLang="ja-JP" sz="2400" b="0" dirty="0"/>
+                </a:p>
+              </p:txBody>
+            </p:sp>
+          </mc:Choice>
+          <mc:Fallback>
+            <p:sp>
+              <p:nvSpPr>
+                <p:cNvPr id="61" name="テキスト ボックス 60">
+                  <a:extLst>
+                    <a:ext uri="{FF2B5EF4-FFF2-40B4-BE49-F238E27FC236}">
+                      <a16:creationId xmlns:a16="http://schemas.microsoft.com/office/drawing/2014/main" id="{C929BC9E-B001-4418-AFE1-6083F3D224D9}"/>
+                    </a:ext>
+                  </a:extLst>
+                </p:cNvPr>
+                <p:cNvSpPr txBox="1">
+                  <a:spLocks noRot="1" noChangeAspect="1" noMove="1" noResize="1" noEditPoints="1" noAdjustHandles="1" noChangeArrowheads="1" noChangeShapeType="1" noTextEdit="1"/>
+                </p:cNvSpPr>
+                <p:nvPr/>
+              </p:nvSpPr>
+              <p:spPr>
+                <a:xfrm>
+                  <a:off x="2337045" y="3061570"/>
+                  <a:ext cx="377026" cy="369332"/>
+                </a:xfrm>
+                <a:prstGeom prst="rect">
+                  <a:avLst/>
+                </a:prstGeom>
+                <a:blipFill>
+                  <a:blip r:embed="rId10"/>
+                  <a:stretch>
+                    <a:fillRect r="-6383" b="-21277"/>
+                  </a:stretch>
+                </a:blipFill>
+              </p:spPr>
+              <p:txBody>
+                <a:bodyPr/>
+                <a:lstStyle/>
+                <a:p>
+                  <a:r>
+                    <a:rPr lang="ja-JP" altLang="en-US">
+                      <a:noFill/>
+                    </a:rPr>
+                    <a:t> </a:t>
+                  </a:r>
+                </a:p>
+              </p:txBody>
+            </p:sp>
+          </mc:Fallback>
+        </mc:AlternateContent>
+        <mc:AlternateContent xmlns:mc="http://schemas.openxmlformats.org/markup-compatibility/2006" xmlns:a14="http://schemas.microsoft.com/office/drawing/2010/main">
+          <mc:Choice Requires="a14">
+            <p:sp>
+              <p:nvSpPr>
+                <p:cNvPr id="62" name="テキスト ボックス 61">
+                  <a:extLst>
+                    <a:ext uri="{FF2B5EF4-FFF2-40B4-BE49-F238E27FC236}">
+                      <a16:creationId xmlns:a16="http://schemas.microsoft.com/office/drawing/2014/main" id="{F4A54F65-D347-489F-9002-A722CFB01E4B}"/>
+                    </a:ext>
+                  </a:extLst>
+                </p:cNvPr>
+                <p:cNvSpPr txBox="1"/>
+                <p:nvPr/>
+              </p:nvSpPr>
+              <p:spPr>
+                <a:xfrm>
+                  <a:off x="2615547" y="3389152"/>
+                  <a:ext cx="359201" cy="338554"/>
+                </a:xfrm>
+                <a:prstGeom prst="rect">
+                  <a:avLst/>
+                </a:prstGeom>
+                <a:noFill/>
+              </p:spPr>
+              <p:txBody>
+                <a:bodyPr wrap="none" rtlCol="0">
+                  <a:spAutoFit/>
+                </a:bodyPr>
+                <a:lstStyle/>
+                <a:p>
+                  <a:pPr/>
+                  <a14:m>
+                    <m:oMathPara xmlns:m="http://schemas.openxmlformats.org/officeDocument/2006/math">
+                      <m:oMathParaPr>
+                        <m:jc m:val="centerGroup"/>
+                      </m:oMathParaPr>
+                      <m:oMath xmlns:m="http://schemas.openxmlformats.org/officeDocument/2006/math">
+                        <m:r>
+                          <a:rPr lang="en-US" altLang="ja-JP" sz="1600" b="0" i="1" smtClean="0">
+                            <a:solidFill>
+                              <a:schemeClr val="tx1"/>
+                            </a:solidFill>
+                            <a:latin typeface="Cambria Math" panose="02040503050406030204" pitchFamily="18" charset="0"/>
+                          </a:rPr>
+                          <m:t>𝑥</m:t>
+                        </m:r>
+                      </m:oMath>
+                    </m:oMathPara>
+                  </a14:m>
+                  <a:endParaRPr lang="en-US" altLang="ja-JP" sz="1600" dirty="0"/>
+                </a:p>
+              </p:txBody>
+            </p:sp>
+          </mc:Choice>
+          <mc:Fallback xmlns="">
+            <p:sp>
+              <p:nvSpPr>
+                <p:cNvPr id="42" name="テキスト ボックス 41">
+                  <a:extLst>
+                    <a:ext uri="{FF2B5EF4-FFF2-40B4-BE49-F238E27FC236}">
+                      <a16:creationId xmlns:a16="http://schemas.microsoft.com/office/drawing/2014/main" id="{9D3A271E-D94D-4992-BD14-A27626FF3BD4}"/>
+                    </a:ext>
+                  </a:extLst>
+                </p:cNvPr>
+                <p:cNvSpPr txBox="1">
+                  <a:spLocks noRot="1" noChangeAspect="1" noMove="1" noResize="1" noEditPoints="1" noAdjustHandles="1" noChangeArrowheads="1" noChangeShapeType="1" noTextEdit="1"/>
+                </p:cNvSpPr>
+                <p:nvPr/>
+              </p:nvSpPr>
+              <p:spPr>
+                <a:xfrm>
+                  <a:off x="2615547" y="3389152"/>
+                  <a:ext cx="359201" cy="338554"/>
+                </a:xfrm>
+                <a:prstGeom prst="rect">
+                  <a:avLst/>
+                </a:prstGeom>
+                <a:blipFill>
+                  <a:blip r:embed="rId6"/>
+                  <a:stretch>
+                    <a:fillRect/>
+                  </a:stretch>
+                </a:blipFill>
+              </p:spPr>
+              <p:txBody>
+                <a:bodyPr/>
+                <a:lstStyle/>
+                <a:p>
+                  <a:r>
+                    <a:rPr lang="ja-JP" altLang="en-US">
+                      <a:noFill/>
+                    </a:rPr>
+                    <a:t> </a:t>
+                  </a:r>
+                </a:p>
+              </p:txBody>
+            </p:sp>
+          </mc:Fallback>
+        </mc:AlternateContent>
+        <mc:AlternateContent xmlns:mc="http://schemas.openxmlformats.org/markup-compatibility/2006" xmlns:a14="http://schemas.microsoft.com/office/drawing/2010/main">
+          <mc:Choice Requires="a14">
+            <p:sp>
+              <p:nvSpPr>
+                <p:cNvPr id="63" name="テキスト ボックス 62">
+                  <a:extLst>
+                    <a:ext uri="{FF2B5EF4-FFF2-40B4-BE49-F238E27FC236}">
+                      <a16:creationId xmlns:a16="http://schemas.microsoft.com/office/drawing/2014/main" id="{13B8EB5F-BCAB-4841-B2A2-B55CA2921039}"/>
+                    </a:ext>
+                  </a:extLst>
+                </p:cNvPr>
+                <p:cNvSpPr txBox="1"/>
+                <p:nvPr/>
+              </p:nvSpPr>
+              <p:spPr>
+                <a:xfrm>
+                  <a:off x="3280172" y="2778456"/>
+                  <a:ext cx="362920" cy="338554"/>
+                </a:xfrm>
+                <a:prstGeom prst="rect">
+                  <a:avLst/>
+                </a:prstGeom>
+                <a:noFill/>
+              </p:spPr>
+              <p:txBody>
+                <a:bodyPr wrap="none" rtlCol="0">
+                  <a:spAutoFit/>
+                </a:bodyPr>
+                <a:lstStyle/>
+                <a:p>
+                  <a:pPr/>
+                  <a14:m>
+                    <m:oMathPara xmlns:m="http://schemas.openxmlformats.org/officeDocument/2006/math">
+                      <m:oMathParaPr>
+                        <m:jc m:val="centerGroup"/>
+                      </m:oMathParaPr>
+                      <m:oMath xmlns:m="http://schemas.openxmlformats.org/officeDocument/2006/math">
+                        <m:r>
+                          <a:rPr lang="en-US" altLang="ja-JP" sz="1600" b="0" i="1" smtClean="0">
+                            <a:latin typeface="Cambria Math" panose="02040503050406030204" pitchFamily="18" charset="0"/>
+                          </a:rPr>
+                          <m:t>𝑦</m:t>
+                        </m:r>
+                      </m:oMath>
+                    </m:oMathPara>
+                  </a14:m>
+                  <a:endParaRPr lang="en-US" altLang="ja-JP" sz="1600" dirty="0"/>
+                </a:p>
+              </p:txBody>
+            </p:sp>
+          </mc:Choice>
+          <mc:Fallback xmlns="">
+            <p:sp>
+              <p:nvSpPr>
+                <p:cNvPr id="43" name="テキスト ボックス 42">
+                  <a:extLst>
+                    <a:ext uri="{FF2B5EF4-FFF2-40B4-BE49-F238E27FC236}">
+                      <a16:creationId xmlns:a16="http://schemas.microsoft.com/office/drawing/2014/main" id="{82155811-47C1-4A2C-93F3-BDE97ABAE526}"/>
+                    </a:ext>
+                  </a:extLst>
+                </p:cNvPr>
+                <p:cNvSpPr txBox="1">
+                  <a:spLocks noRot="1" noChangeAspect="1" noMove="1" noResize="1" noEditPoints="1" noAdjustHandles="1" noChangeArrowheads="1" noChangeShapeType="1" noTextEdit="1"/>
+                </p:cNvSpPr>
+                <p:nvPr/>
+              </p:nvSpPr>
+              <p:spPr>
+                <a:xfrm>
+                  <a:off x="3280172" y="2778456"/>
+                  <a:ext cx="362920" cy="338554"/>
+                </a:xfrm>
+                <a:prstGeom prst="rect">
+                  <a:avLst/>
+                </a:prstGeom>
+                <a:blipFill>
+                  <a:blip r:embed="rId7"/>
+                  <a:stretch>
+                    <a:fillRect b="-3636"/>
+                  </a:stretch>
+                </a:blipFill>
+              </p:spPr>
+              <p:txBody>
+                <a:bodyPr/>
+                <a:lstStyle/>
+                <a:p>
+                  <a:r>
+                    <a:rPr lang="ja-JP" altLang="en-US">
+                      <a:noFill/>
+                    </a:rPr>
+                    <a:t> </a:t>
+                  </a:r>
+                </a:p>
+              </p:txBody>
+            </p:sp>
+          </mc:Fallback>
+        </mc:AlternateContent>
+      </p:grpSp>
+      <p:sp>
+        <p:nvSpPr>
+          <p:cNvPr id="3" name="矢印: 右 2">
+            <a:extLst>
+              <a:ext uri="{FF2B5EF4-FFF2-40B4-BE49-F238E27FC236}">
+                <a16:creationId xmlns:a16="http://schemas.microsoft.com/office/drawing/2014/main" id="{37DAB203-BB08-40A9-812A-2486C7260D1E}"/>
+              </a:ext>
+            </a:extLst>
+          </p:cNvPr>
+          <p:cNvSpPr/>
+          <p:nvPr/>
+        </p:nvSpPr>
+        <p:spPr>
+          <a:xfrm>
+            <a:off x="3608937" y="3852285"/>
+            <a:ext cx="2027726" cy="601937"/>
+          </a:xfrm>
+          <a:prstGeom prst="rightArrow">
+            <a:avLst/>
+          </a:prstGeom>
+        </p:spPr>
+        <p:style>
+          <a:lnRef idx="2">
+            <a:schemeClr val="accent1">
+              <a:shade val="50000"/>
+            </a:schemeClr>
+          </a:lnRef>
+          <a:fillRef idx="1">
+            <a:schemeClr val="accent1"/>
+          </a:fillRef>
+          <a:effectRef idx="0">
+            <a:schemeClr val="accent1"/>
+          </a:effectRef>
+          <a:fontRef idx="minor">
+            <a:schemeClr val="lt1"/>
+          </a:fontRef>
+        </p:style>
+        <p:txBody>
+          <a:bodyPr rtlCol="0" anchor="ctr"/>
+          <a:lstStyle/>
+          <a:p>
+            <a:pPr algn="ctr"/>
+            <a:r>
+              <a:rPr kumimoji="1" lang="en-US" altLang="ja-JP" b="1" dirty="0"/>
+              <a:t>100</a:t>
+            </a:r>
+            <a:r>
+              <a:rPr kumimoji="1" lang="ja-JP" altLang="en-US" b="1" dirty="0"/>
+              <a:t>倍</a:t>
+            </a:r>
+          </a:p>
+        </p:txBody>
+      </p:sp>
     </p:spTree>
     <p:extLst>
       <p:ext uri="{BB962C8B-B14F-4D97-AF65-F5344CB8AC3E}">
-        <p14:creationId xmlns:p14="http://schemas.microsoft.com/office/powerpoint/2010/main" val="755295909"/>
+        <p14:creationId xmlns:p14="http://schemas.microsoft.com/office/powerpoint/2010/main" val="379772169"/>
       </p:ext>
     </p:extLst>
   </p:cSld>
@@ -6273,7 +8069,7 @@
         <p:spPr>
           <a:xfrm>
             <a:off x="567542" y="1216429"/>
-            <a:ext cx="6792244" cy="2308324"/>
+            <a:ext cx="11572399" cy="461665"/>
           </a:xfrm>
           <a:prstGeom prst="rect">
             <a:avLst/>
@@ -6287,68 +8083,206 @@
           <a:lstStyle/>
           <a:p>
             <a:r>
+              <a:rPr lang="ja-JP" altLang="en-US" sz="2400" dirty="0"/>
+              <a:t>つまり三角関数に半径を掛け算すれば、</a:t>
+            </a:r>
+            <a:r>
               <a:rPr kumimoji="1" lang="ja-JP" altLang="en-US" sz="2400" dirty="0"/>
-              <a:t>ここからは前回の</a:t>
-            </a:r>
-            <a:r>
-              <a:rPr kumimoji="1" lang="en-US" altLang="ja-JP" sz="2400" dirty="0"/>
-              <a:t>Sin</a:t>
-            </a:r>
-            <a:r>
-              <a:rPr kumimoji="1" lang="ja-JP" altLang="en-US" sz="2400" dirty="0"/>
-              <a:t>波とやることは同じです。</a:t>
-            </a:r>
-            <a:endParaRPr kumimoji="1" lang="en-US" altLang="ja-JP" sz="2400" dirty="0"/>
-          </a:p>
-          <a:p>
-            <a:endParaRPr lang="en-US" altLang="ja-JP" sz="2400" dirty="0"/>
-          </a:p>
-          <a:p>
-            <a:r>
-              <a:rPr kumimoji="1" lang="ja-JP" altLang="en-US" sz="2400" dirty="0"/>
-              <a:t>③ 角度を加算する</a:t>
-            </a:r>
-            <a:endParaRPr kumimoji="1" lang="en-US" altLang="ja-JP" sz="2400" dirty="0"/>
-          </a:p>
-          <a:p>
-            <a:r>
-              <a:rPr lang="ja-JP" altLang="en-US" sz="2400" dirty="0"/>
-              <a:t>④ 角度を</a:t>
-            </a:r>
-            <a:r>
-              <a:rPr lang="en-US" altLang="ja-JP" sz="2400" dirty="0"/>
-              <a:t>0</a:t>
-            </a:r>
-            <a:r>
-              <a:rPr lang="ja-JP" altLang="en-US" sz="2400" dirty="0"/>
-              <a:t>～</a:t>
-            </a:r>
-            <a:r>
-              <a:rPr lang="en-US" altLang="ja-JP" sz="2400" dirty="0"/>
-              <a:t>2π</a:t>
-            </a:r>
-            <a:r>
-              <a:rPr lang="ja-JP" altLang="en-US" sz="2400" dirty="0"/>
-              <a:t>の範囲にする</a:t>
-            </a:r>
-            <a:endParaRPr lang="en-US" altLang="ja-JP" sz="2400" dirty="0"/>
-          </a:p>
-          <a:p>
-            <a:endParaRPr kumimoji="1" lang="en-US" altLang="ja-JP" sz="2400" dirty="0"/>
-          </a:p>
-          <a:p>
-            <a:r>
-              <a:rPr lang="ja-JP" altLang="en-US" sz="2400" dirty="0"/>
-              <a:t>前回を思い出しながら組み込みましょう。</a:t>
+              <a:t>その半径上を移動させることができます。</a:t>
             </a:r>
             <a:endParaRPr kumimoji="1" lang="en-US" altLang="ja-JP" sz="2400" dirty="0"/>
           </a:p>
         </p:txBody>
       </p:sp>
+      <p:pic>
+        <p:nvPicPr>
+          <p:cNvPr id="5" name="図 4">
+            <a:extLst>
+              <a:ext uri="{FF2B5EF4-FFF2-40B4-BE49-F238E27FC236}">
+                <a16:creationId xmlns:a16="http://schemas.microsoft.com/office/drawing/2014/main" id="{7D50F2FD-B4C1-4843-B748-4D22D0D48EE6}"/>
+              </a:ext>
+            </a:extLst>
+          </p:cNvPr>
+          <p:cNvPicPr>
+            <a:picLocks noChangeAspect="1"/>
+          </p:cNvPicPr>
+          <p:nvPr/>
+        </p:nvPicPr>
+        <p:blipFill>
+          <a:blip r:embed="rId2"/>
+          <a:stretch>
+            <a:fillRect/>
+          </a:stretch>
+        </p:blipFill>
+        <p:spPr>
+          <a:xfrm>
+            <a:off x="567542" y="1817793"/>
+            <a:ext cx="10454748" cy="2288539"/>
+          </a:xfrm>
+          <a:prstGeom prst="rect">
+            <a:avLst/>
+          </a:prstGeom>
+        </p:spPr>
+      </p:pic>
     </p:spTree>
     <p:extLst>
       <p:ext uri="{BB962C8B-B14F-4D97-AF65-F5344CB8AC3E}">
-        <p14:creationId xmlns:p14="http://schemas.microsoft.com/office/powerpoint/2010/main" val="3292353639"/>
+        <p14:creationId xmlns:p14="http://schemas.microsoft.com/office/powerpoint/2010/main" val="822911890"/>
+      </p:ext>
+    </p:extLst>
+  </p:cSld>
+  <p:clrMapOvr>
+    <a:masterClrMapping/>
+  </p:clrMapOvr>
+</p:sld>
+</file>
+
+<file path=ppt/slides/slide7.xml><?xml version="1.0" encoding="utf-8"?>
+<p:sld xmlns:a="http://schemas.openxmlformats.org/drawingml/2006/main" xmlns:r="http://schemas.openxmlformats.org/officeDocument/2006/relationships" xmlns:p="http://schemas.openxmlformats.org/presentationml/2006/main">
+  <p:cSld>
+    <p:spTree>
+      <p:nvGrpSpPr>
+        <p:cNvPr id="1" name=""/>
+        <p:cNvGrpSpPr/>
+        <p:nvPr/>
+      </p:nvGrpSpPr>
+      <p:grpSpPr>
+        <a:xfrm>
+          <a:off x="0" y="0"/>
+          <a:ext cx="0" cy="0"/>
+          <a:chOff x="0" y="0"/>
+          <a:chExt cx="0" cy="0"/>
+        </a:xfrm>
+      </p:grpSpPr>
+      <p:sp>
+        <p:nvSpPr>
+          <p:cNvPr id="4" name="テキスト ボックス 3">
+            <a:extLst>
+              <a:ext uri="{FF2B5EF4-FFF2-40B4-BE49-F238E27FC236}">
+                <a16:creationId xmlns:a16="http://schemas.microsoft.com/office/drawing/2014/main" id="{5A13BF46-B8C5-48AA-8308-C9ECFF431A18}"/>
+              </a:ext>
+            </a:extLst>
+          </p:cNvPr>
+          <p:cNvSpPr txBox="1"/>
+          <p:nvPr/>
+        </p:nvSpPr>
+        <p:spPr>
+          <a:xfrm>
+            <a:off x="567542" y="491954"/>
+            <a:ext cx="2353529" cy="584775"/>
+          </a:xfrm>
+          <a:prstGeom prst="rect">
+            <a:avLst/>
+          </a:prstGeom>
+          <a:noFill/>
+        </p:spPr>
+        <p:txBody>
+          <a:bodyPr wrap="none" rtlCol="0">
+            <a:spAutoFit/>
+          </a:bodyPr>
+          <a:lstStyle/>
+          <a:p>
+            <a:r>
+              <a:rPr kumimoji="1" lang="ja-JP" altLang="en-US" sz="3200" b="1" u="sng" dirty="0"/>
+              <a:t>円移動 練習</a:t>
+            </a:r>
+          </a:p>
+        </p:txBody>
+      </p:sp>
+      <p:sp>
+        <p:nvSpPr>
+          <p:cNvPr id="6" name="テキスト ボックス 5">
+            <a:extLst>
+              <a:ext uri="{FF2B5EF4-FFF2-40B4-BE49-F238E27FC236}">
+                <a16:creationId xmlns:a16="http://schemas.microsoft.com/office/drawing/2014/main" id="{55830AD6-028B-4C4E-80BF-B70DFC1C3A46}"/>
+              </a:ext>
+            </a:extLst>
+          </p:cNvPr>
+          <p:cNvSpPr txBox="1"/>
+          <p:nvPr/>
+        </p:nvSpPr>
+        <p:spPr>
+          <a:xfrm>
+            <a:off x="567542" y="1216429"/>
+            <a:ext cx="10411825" cy="461665"/>
+          </a:xfrm>
+          <a:prstGeom prst="rect">
+            <a:avLst/>
+          </a:prstGeom>
+          <a:noFill/>
+        </p:spPr>
+        <p:txBody>
+          <a:bodyPr wrap="none" rtlCol="0">
+            <a:spAutoFit/>
+          </a:bodyPr>
+          <a:lstStyle/>
+          <a:p>
+            <a:r>
+              <a:rPr kumimoji="1" lang="ja-JP" altLang="en-US" sz="2400" dirty="0"/>
+              <a:t>半径を</a:t>
+            </a:r>
+            <a:r>
+              <a:rPr kumimoji="1" lang="en-US" altLang="ja-JP" sz="2400" dirty="0"/>
+              <a:t>80</a:t>
+            </a:r>
+            <a:r>
+              <a:rPr kumimoji="1" lang="ja-JP" altLang="en-US" sz="2400" dirty="0"/>
+              <a:t>に変更し、</a:t>
+            </a:r>
+            <a:r>
+              <a:rPr kumimoji="1" lang="en-US" altLang="ja-JP" sz="2400" dirty="0"/>
+              <a:t>4</a:t>
+            </a:r>
+            <a:r>
+              <a:rPr kumimoji="1" lang="ja-JP" altLang="en-US" sz="2400" dirty="0"/>
+              <a:t>秒で</a:t>
+            </a:r>
+            <a:r>
+              <a:rPr kumimoji="1" lang="en-US" altLang="ja-JP" sz="2400" dirty="0"/>
+              <a:t>1</a:t>
+            </a:r>
+            <a:r>
+              <a:rPr kumimoji="1" lang="ja-JP" altLang="en-US" sz="2400" dirty="0"/>
+              <a:t>回転するようにプログラムを修正しましょう。</a:t>
+            </a:r>
+            <a:endParaRPr kumimoji="1" lang="en-US" altLang="ja-JP" sz="2400" dirty="0"/>
+          </a:p>
+        </p:txBody>
+      </p:sp>
+      <p:pic>
+        <p:nvPicPr>
+          <p:cNvPr id="3" name="図 2">
+            <a:extLst>
+              <a:ext uri="{FF2B5EF4-FFF2-40B4-BE49-F238E27FC236}">
+                <a16:creationId xmlns:a16="http://schemas.microsoft.com/office/drawing/2014/main" id="{6704079E-7F6F-4219-893C-67F1DBD1F673}"/>
+              </a:ext>
+            </a:extLst>
+          </p:cNvPr>
+          <p:cNvPicPr>
+            <a:picLocks noChangeAspect="1"/>
+          </p:cNvPicPr>
+          <p:nvPr/>
+        </p:nvPicPr>
+        <p:blipFill>
+          <a:blip r:embed="rId2"/>
+          <a:stretch>
+            <a:fillRect/>
+          </a:stretch>
+        </p:blipFill>
+        <p:spPr>
+          <a:xfrm>
+            <a:off x="567542" y="1817794"/>
+            <a:ext cx="7551992" cy="2265597"/>
+          </a:xfrm>
+          <a:prstGeom prst="rect">
+            <a:avLst/>
+          </a:prstGeom>
+        </p:spPr>
+      </p:pic>
+    </p:spTree>
+    <p:extLst>
+      <p:ext uri="{BB962C8B-B14F-4D97-AF65-F5344CB8AC3E}">
+        <p14:creationId xmlns:p14="http://schemas.microsoft.com/office/powerpoint/2010/main" val="1207137931"/>
       </p:ext>
     </p:extLst>
   </p:cSld>
